--- a/slides/release/14-capstone.pptx
+++ b/slides/release/14-capstone.pptx
@@ -3765,13 +3765,13 @@
           <p:nvPr>
             <p:extLst>
               <p:ext uri="{D42A27DB-BD31-4B8C-83A1-F6EECF244321}">
-                <p14:modId xmlns:p14="http://schemas.microsoft.com/office/powerpoint/2010/main" val="1454222188"/>
+                <p14:modId xmlns:p14="http://schemas.microsoft.com/office/powerpoint/2010/main" val="893261191"/>
               </p:ext>
             </p:extLst>
           </p:nvPr>
         </p:nvGraphicFramePr>
         <p:xfrm>
-          <a:off x="250444" y="1602231"/>
+          <a:off x="234950" y="2286391"/>
           <a:ext cx="8902700" cy="3462642"/>
         </p:xfrm>
         <a:graphic>

--- a/slides/release/14-capstone.pptx
+++ b/slides/release/14-capstone.pptx
@@ -5,10 +5,10 @@
     <p:sldMasterId id="2147483651" r:id="rId1"/>
   </p:sldMasterIdLst>
   <p:notesMasterIdLst>
-    <p:notesMasterId r:id="rId16"/>
+    <p:notesMasterId r:id="rId18"/>
   </p:notesMasterIdLst>
   <p:handoutMasterIdLst>
-    <p:handoutMasterId r:id="rId17"/>
+    <p:handoutMasterId r:id="rId19"/>
   </p:handoutMasterIdLst>
   <p:sldIdLst>
     <p:sldId id="256" r:id="rId2"/>
@@ -25,6 +25,8 @@
     <p:sldId id="267" r:id="rId13"/>
     <p:sldId id="268" r:id="rId14"/>
     <p:sldId id="269" r:id="rId15"/>
+    <p:sldId id="270" r:id="rId16"/>
+    <p:sldId id="271" r:id="rId17"/>
   </p:sldIdLst>
   <p:sldSz cx="9372600" cy="8297863"/>
   <p:notesSz cx="7315200" cy="9601200"/>
@@ -2410,7 +2412,7 @@
           <a:lstStyle/>
           <a:p>
             <a:r>
-              <a:t>Common Pitfalls</a:t>
+              <a:t>Deliverables</a:t>
             </a:r>
           </a:p>
         </p:txBody>
@@ -2431,11 +2433,448 @@
           <a:lstStyle/>
           <a:p>
             <a:r>
+              <a:t> A completed</a:t>
+            </a:r>
+          </a:p>
+          <a:p>
+            <a:r>
+              <a:rPr b="1" i="1"/>
+              <a:t> agent-design-canvas.md</a:t>
+            </a:r>
+            <a:r>
+              <a:t> — all seven sections, your own copy</a:t>
+            </a:r>
+          </a:p>
+          <a:p>
+            <a:r>
+              <a:rPr b="1"/>
+              <a:t> One picture</a:t>
+            </a:r>
+            <a:r>
+              <a:t> carrying all six capabilities</a:t>
+            </a:r>
+          </a:p>
+          <a:p>
+            <a:r>
+              <a:rPr b="1"/>
+              <a:t> 5-8 named test cases</a:t>
+            </a:r>
+            <a:r>
+              <a:t> , one of them an unsafe request — you name them, you don't run them</a:t>
+            </a:r>
+          </a:p>
+          <a:p>
+            <a:r>
+              <a:t> Ten minutes that survive the room</a:t>
+            </a:r>
+          </a:p>
+          <a:p>
+            <a:endParaRPr/>
+          </a:p>
+          <a:p>
+            <a:endParaRPr/>
+          </a:p>
+          <a:p>
+            <a:endParaRPr/>
+          </a:p>
+        </p:txBody>
+      </p:sp>
+      <p:sp>
+        <p:nvSpPr>
+          <p:cNvPr id="4" name="TextBox 3"/>
+          <p:cNvSpPr txBox="1"/>
+          <p:nvPr/>
+        </p:nvSpPr>
+        <p:spPr>
+          <a:xfrm>
+            <a:off x="704088" y="8065008"/>
+            <a:ext cx="8915400" cy="228600"/>
+          </a:xfrm>
+          <a:prstGeom prst="rect">
+            <a:avLst/>
+          </a:prstGeom>
+          <a:noFill/>
+        </p:spPr>
+        <p:txBody>
+          <a:bodyPr wrap="none">
+            <a:spAutoFit/>
+          </a:bodyPr>
+          <a:lstStyle/>
+          <a:p>
+            <a:r>
+              <a:rPr sz="800">
+                <a:solidFill>
+                  <a:srgbClr val="000000"/>
+                </a:solidFill>
+              </a:rPr>
+              <a:t>Copyright © 2026 by Elephant Scale, All Rights Reserved</a:t>
+            </a:r>
+          </a:p>
+        </p:txBody>
+      </p:sp>
+      <p:pic>
+        <p:nvPicPr>
+          <p:cNvPr id="5" name="Picture 4" descr="1.png"/>
+          <p:cNvPicPr>
+            <a:picLocks noChangeAspect="1"/>
+          </p:cNvPicPr>
+          <p:nvPr/>
+        </p:nvPicPr>
+        <p:blipFill>
+          <a:blip r:embed="rId2"/>
+          <a:stretch>
+            <a:fillRect/>
+          </a:stretch>
+        </p:blipFill>
+        <p:spPr>
+          <a:xfrm>
+            <a:off x="0" y="4642109"/>
+            <a:ext cx="9372600" cy="1087891"/>
+          </a:xfrm>
+          <a:prstGeom prst="rect">
+            <a:avLst/>
+          </a:prstGeom>
+        </p:spPr>
+      </p:pic>
+      <p:sp>
+        <p:nvSpPr>
+          <p:cNvPr id="6" name="Rectangle 5"/>
+          <p:cNvSpPr/>
+          <p:nvPr/>
+        </p:nvSpPr>
+        <p:spPr>
+          <a:xfrm>
+            <a:off x="419100" y="6936870"/>
+            <a:ext cx="7507224" cy="877824"/>
+          </a:xfrm>
+          <a:prstGeom prst="rect">
+            <a:avLst/>
+          </a:prstGeom>
+          <a:solidFill>
+            <a:srgbClr val="F2F2F2"/>
+          </a:solidFill>
+          <a:ln>
+            <a:solidFill>
+              <a:srgbClr val="D9D9D9"/>
+            </a:solidFill>
+          </a:ln>
+        </p:spPr>
+        <p:style>
+          <a:lnRef idx="1">
+            <a:schemeClr val="accent1"/>
+          </a:lnRef>
+          <a:fillRef idx="3">
+            <a:schemeClr val="accent1"/>
+          </a:fillRef>
+          <a:effectRef idx="2">
+            <a:schemeClr val="accent1"/>
+          </a:effectRef>
+          <a:fontRef idx="minor">
+            <a:schemeClr val="lt1"/>
+          </a:fontRef>
+        </p:style>
+        <p:txBody>
+          <a:bodyPr lIns="128016" tIns="73152" rIns="128016" bIns="73152" rtlCol="0" anchor="ctr"/>
+          <a:lstStyle/>
+          <a:p>
+            <a:pPr algn="ctr"/>
+            <a:r>
+              <a:rPr sz="1800" i="1">
+                <a:solidFill>
+                  <a:srgbClr val="333333"/>
+                </a:solidFill>
+              </a:rPr>
+              <a:t>The most valuable line you will write today is "out of scope".</a:t>
+            </a:r>
+          </a:p>
+        </p:txBody>
+      </p:sp>
+    </p:spTree>
+  </p:cSld>
+  <p:clrMapOvr>
+    <a:masterClrMapping/>
+  </p:clrMapOvr>
+</p:sld>
+</file>
+
+<file path=ppt/slides/slide11.xml><?xml version="1.0" encoding="utf-8"?>
+<p:sld xmlns:a="http://schemas.openxmlformats.org/drawingml/2006/main" xmlns:r="http://schemas.openxmlformats.org/officeDocument/2006/relationships" xmlns:p="http://schemas.openxmlformats.org/presentationml/2006/main">
+  <p:cSld>
+    <p:spTree>
+      <p:nvGrpSpPr>
+        <p:cNvPr id="1" name=""/>
+        <p:cNvGrpSpPr/>
+        <p:nvPr/>
+      </p:nvGrpSpPr>
+      <p:grpSpPr>
+        <a:xfrm>
+          <a:off x="0" y="0"/>
+          <a:ext cx="0" cy="0"/>
+          <a:chOff x="0" y="0"/>
+          <a:chExt cx="0" cy="0"/>
+        </a:xfrm>
+      </p:grpSpPr>
+      <p:sp>
+        <p:nvSpPr>
+          <p:cNvPr id="2" name="Title 1"/>
+          <p:cNvSpPr>
+            <a:spLocks noGrp="1"/>
+          </p:cNvSpPr>
+          <p:nvPr>
+            <p:ph type="title"/>
+          </p:nvPr>
+        </p:nvSpPr>
+        <p:spPr/>
+        <p:txBody>
+          <a:bodyPr/>
+          <a:lstStyle/>
+          <a:p>
+            <a:r>
+              <a:t>Tips</a:t>
+            </a:r>
+          </a:p>
+        </p:txBody>
+      </p:sp>
+      <p:sp>
+        <p:nvSpPr>
+          <p:cNvPr id="3" name="Content Placeholder 2"/>
+          <p:cNvSpPr>
+            <a:spLocks noGrp="1"/>
+          </p:cNvSpPr>
+          <p:nvPr>
+            <p:ph idx="1"/>
+          </p:nvPr>
+        </p:nvSpPr>
+        <p:spPr/>
+        <p:txBody>
+          <a:bodyPr/>
+          <a:lstStyle/>
+          <a:p>
+            <a:r>
+              <a:rPr b="1"/>
+              <a:t> One use case, two roles, one dangerous action</a:t>
+            </a:r>
+            <a:r>
+              <a:t> — that is the whole scope</a:t>
+            </a:r>
+          </a:p>
+          <a:p>
+            <a:r>
+              <a:rPr b="1"/>
+              <a:t> Nothing dangerous in your tools table?</a:t>
+            </a:r>
+            <a:r>
+              <a:t> Then there's no gate and no governance — add a real action</a:t>
+            </a:r>
+          </a:p>
+          <a:p>
+            <a:r>
+              <a:rPr b="1"/>
+              <a:t> Label every arrow</a:t>
+            </a:r>
+            <a:r>
+              <a:t> — an unlabelled arrow means "related somehow", which is not a design</a:t>
+            </a:r>
+          </a:p>
+          <a:p>
+            <a:r>
+              <a:rPr b="1"/>
+              <a:t> Name the approver</a:t>
+            </a:r>
+            <a:r>
+              <a:t> , not just the gate: who are they, and what do they see?</a:t>
+            </a:r>
+          </a:p>
+          <a:p>
+            <a:r>
+              <a:rPr b="1"/>
+              <a:t> Write "out of scope" early</a:t>
+            </a:r>
+            <a:r>
+              <a:t> — it is the fastest way to stop a team arguing</a:t>
+            </a:r>
+          </a:p>
+          <a:p>
+            <a:r>
+              <a:t> Reuse the course assets:</a:t>
+            </a:r>
+            <a:r>
+              <a:rPr>
+                <a:latin typeface="Courier New"/>
+              </a:rPr>
+              <a:t> help_center.md</a:t>
+            </a:r>
+            <a:r>
+              <a:t> ,</a:t>
+            </a:r>
+            <a:r>
+              <a:rPr>
+                <a:latin typeface="Courier New"/>
+              </a:rPr>
+              <a:t> support_tickets.csv</a:t>
+            </a:r>
+            <a:r>
+              <a:t> , the audit schema</a:t>
+            </a:r>
+          </a:p>
+          <a:p>
+            <a:endParaRPr/>
+          </a:p>
+        </p:txBody>
+      </p:sp>
+      <p:sp>
+        <p:nvSpPr>
+          <p:cNvPr id="4" name="TextBox 3"/>
+          <p:cNvSpPr txBox="1"/>
+          <p:nvPr/>
+        </p:nvSpPr>
+        <p:spPr>
+          <a:xfrm>
+            <a:off x="704088" y="8065008"/>
+            <a:ext cx="8915400" cy="228600"/>
+          </a:xfrm>
+          <a:prstGeom prst="rect">
+            <a:avLst/>
+          </a:prstGeom>
+          <a:noFill/>
+        </p:spPr>
+        <p:txBody>
+          <a:bodyPr wrap="none">
+            <a:spAutoFit/>
+          </a:bodyPr>
+          <a:lstStyle/>
+          <a:p>
+            <a:r>
+              <a:rPr sz="800">
+                <a:solidFill>
+                  <a:srgbClr val="000000"/>
+                </a:solidFill>
+              </a:rPr>
+              <a:t>Copyright © 2026 by Elephant Scale, All Rights Reserved</a:t>
+            </a:r>
+          </a:p>
+        </p:txBody>
+      </p:sp>
+      <p:sp>
+        <p:nvSpPr>
+          <p:cNvPr id="5" name="Rectangle 4"/>
+          <p:cNvSpPr/>
+          <p:nvPr/>
+        </p:nvSpPr>
+        <p:spPr>
+          <a:xfrm>
+            <a:off x="342900" y="6863975"/>
+            <a:ext cx="7507224" cy="877824"/>
+          </a:xfrm>
+          <a:prstGeom prst="rect">
+            <a:avLst/>
+          </a:prstGeom>
+          <a:solidFill>
+            <a:srgbClr val="F2F2F2"/>
+          </a:solidFill>
+          <a:ln>
+            <a:solidFill>
+              <a:srgbClr val="D9D9D9"/>
+            </a:solidFill>
+          </a:ln>
+        </p:spPr>
+        <p:style>
+          <a:lnRef idx="1">
+            <a:schemeClr val="accent1"/>
+          </a:lnRef>
+          <a:fillRef idx="3">
+            <a:schemeClr val="accent1"/>
+          </a:fillRef>
+          <a:effectRef idx="2">
+            <a:schemeClr val="accent1"/>
+          </a:effectRef>
+          <a:fontRef idx="minor">
+            <a:schemeClr val="lt1"/>
+          </a:fontRef>
+        </p:style>
+        <p:txBody>
+          <a:bodyPr lIns="128016" tIns="73152" rIns="128016" bIns="73152" rtlCol="0" anchor="ctr"/>
+          <a:lstStyle/>
+          <a:p>
+            <a:pPr algn="ctr"/>
+            <a:r>
+              <a:rPr sz="1800" i="1">
+                <a:solidFill>
+                  <a:srgbClr val="333333"/>
+                </a:solidFill>
+              </a:rPr>
+              <a:t>Every hour ask: "if someone senior read this page, what's the first question they'd ask?" Answer it.</a:t>
+            </a:r>
+          </a:p>
+        </p:txBody>
+      </p:sp>
+    </p:spTree>
+  </p:cSld>
+  <p:clrMapOvr>
+    <a:masterClrMapping/>
+  </p:clrMapOvr>
+</p:sld>
+</file>
+
+<file path=ppt/slides/slide12.xml><?xml version="1.0" encoding="utf-8"?>
+<p:sld xmlns:a="http://schemas.openxmlformats.org/drawingml/2006/main" xmlns:r="http://schemas.openxmlformats.org/officeDocument/2006/relationships" xmlns:p="http://schemas.openxmlformats.org/presentationml/2006/main">
+  <p:cSld>
+    <p:spTree>
+      <p:nvGrpSpPr>
+        <p:cNvPr id="1" name=""/>
+        <p:cNvGrpSpPr/>
+        <p:nvPr/>
+      </p:nvGrpSpPr>
+      <p:grpSpPr>
+        <a:xfrm>
+          <a:off x="0" y="0"/>
+          <a:ext cx="0" cy="0"/>
+          <a:chOff x="0" y="0"/>
+          <a:chExt cx="0" cy="0"/>
+        </a:xfrm>
+      </p:grpSpPr>
+      <p:sp>
+        <p:nvSpPr>
+          <p:cNvPr id="2" name="Title 1"/>
+          <p:cNvSpPr>
+            <a:spLocks noGrp="1"/>
+          </p:cNvSpPr>
+          <p:nvPr>
+            <p:ph type="title"/>
+          </p:nvPr>
+        </p:nvSpPr>
+        <p:spPr/>
+        <p:txBody>
+          <a:bodyPr/>
+          <a:lstStyle/>
+          <a:p>
+            <a:r>
+              <a:t>Common Pitfalls</a:t>
+            </a:r>
+          </a:p>
+        </p:txBody>
+      </p:sp>
+      <p:sp>
+        <p:nvSpPr>
+          <p:cNvPr id="3" name="Content Placeholder 2"/>
+          <p:cNvSpPr>
+            <a:spLocks noGrp="1"/>
+          </p:cNvSpPr>
+          <p:nvPr>
+            <p:ph idx="1"/>
+          </p:nvPr>
+        </p:nvSpPr>
+        <p:spPr/>
+        <p:txBody>
+          <a:bodyPr/>
+          <a:lstStyle/>
+          <a:p>
+            <a:r>
               <a:rPr b="1"/>
               <a:t> Scope creep</a:t>
             </a:r>
             <a:r>
-              <a:t> — five domains, zero finished. Pick one use case.</a:t>
+              <a:t> — five domains, zero defended. Pick one use case.</a:t>
             </a:r>
           </a:p>
           <a:p>
@@ -2444,50 +2883,43 @@
               <a:t> Prompt-in-a-trenchcoat</a:t>
             </a:r>
             <a:r>
-              <a:t> — one giant prompt pretending to be multi-agent</a:t>
+              <a:t> — one box labelled "the agent" is not multi-agent</a:t>
             </a:r>
           </a:p>
           <a:p>
             <a:r>
               <a:rPr b="1"/>
-              <a:t> No eval set</a:t>
-            </a:r>
-            <a:r>
-              <a:t> — "it worked when I tried it" is not evaluation</a:t>
+              <a:t> A blind approver</a:t>
+            </a:r>
+            <a:r>
+              <a:t> — a gate the human has no basis to decide at</a:t>
             </a:r>
           </a:p>
           <a:p>
             <a:r>
               <a:rPr b="1"/>
-              <a:t> Governance bolted on at 4 p.m.</a:t>
-            </a:r>
-            <a:r>
-              <a:t> — the log and the gate are design, not garnish</a:t>
+              <a:t> No unsafe test case</a:t>
+            </a:r>
+            <a:r>
+              <a:t> — the one case that proves you thought about misuse</a:t>
             </a:r>
           </a:p>
           <a:p>
             <a:r>
               <a:rPr b="1"/>
-              <a:t> Demo-by-slides</a:t>
-            </a:r>
-            <a:r>
-              <a:t> — reviewers want it</a:t>
-            </a:r>
-            <a:r>
-              <a:rPr i="1"/>
-              <a:t> live</a:t>
-            </a:r>
-            <a:r>
-              <a:t> , including the failure case</a:t>
+              <a:t> Unlabelled arrows</a:t>
+            </a:r>
+            <a:r>
+              <a:t> — a drawing that looks like a design and isn't</a:t>
             </a:r>
           </a:p>
           <a:p>
             <a:r>
               <a:rPr b="1"/>
-              <a:t> Real integrations eating the day</a:t>
-            </a:r>
-            <a:r>
-              <a:t> — a flaky API will cost you the eval</a:t>
+              <a:t> Governance drawn last</a:t>
+            </a:r>
+            <a:r>
+              <a:t> — it's one star and one box; put it in at 11:00</a:t>
             </a:r>
           </a:p>
           <a:p>
@@ -2571,12 +3003,12 @@
           <a:p>
             <a:pPr algn="ctr"/>
             <a:r>
-              <a:rPr sz="1800" i="1">
+              <a:rPr sz="1800" i="1" dirty="0">
                 <a:solidFill>
                   <a:srgbClr val="333333"/>
                 </a:solidFill>
               </a:rPr>
-              <a:t>The failure mode is always the same: too much scope, safety last, and nothing that runs end to end.</a:t>
+              <a:t>The failure mode is always the same: too much scope, safety last, and a picture nobody can walk.</a:t>
             </a:r>
           </a:p>
         </p:txBody>
@@ -2589,7 +3021,7 @@
 </p:sld>
 </file>
 
-<file path=ppt/slides/slide11.xml><?xml version="1.0" encoding="utf-8"?>
+<file path=ppt/slides/slide13.xml><?xml version="1.0" encoding="utf-8"?>
 <p:sld xmlns:a="http://schemas.openxmlformats.org/drawingml/2006/main" xmlns:r="http://schemas.openxmlformats.org/officeDocument/2006/relationships" xmlns:p="http://schemas.openxmlformats.org/presentationml/2006/main">
   <p:cSld>
     <p:spTree>
@@ -2721,7 +3153,7 @@
         </p:nvSpPr>
         <p:spPr>
           <a:xfrm>
-            <a:off x="239712" y="6863975"/>
+            <a:off x="244475" y="6945602"/>
             <a:ext cx="7507224" cy="877824"/>
           </a:xfrm>
           <a:prstGeom prst="rect">
@@ -2774,7 +3206,7 @@
 </p:sld>
 </file>
 
-<file path=ppt/slides/slide12.xml><?xml version="1.0" encoding="utf-8"?>
+<file path=ppt/slides/slide14.xml><?xml version="1.0" encoding="utf-8"?>
 <p:sld xmlns:a="http://schemas.openxmlformats.org/drawingml/2006/main" xmlns:r="http://schemas.openxmlformats.org/officeDocument/2006/relationships" xmlns:p="http://schemas.openxmlformats.org/presentationml/2006/main">
   <p:cSld>
     <p:spTree>
@@ -2944,7 +3376,7 @@
         </p:nvSpPr>
         <p:spPr>
           <a:xfrm>
-            <a:off x="244475" y="6907883"/>
+            <a:off x="495300" y="6739731"/>
             <a:ext cx="7507224" cy="877824"/>
           </a:xfrm>
           <a:prstGeom prst="rect">
@@ -2979,7 +3411,7 @@
           <a:p>
             <a:pPr algn="ctr"/>
             <a:r>
-              <a:rPr sz="1800" i="1">
+              <a:rPr sz="1800" i="1" dirty="0">
                 <a:solidFill>
                   <a:srgbClr val="333333"/>
                 </a:solidFill>
@@ -2997,7 +3429,7 @@
 </p:sld>
 </file>
 
-<file path=ppt/slides/slide13.xml><?xml version="1.0" encoding="utf-8"?>
+<file path=ppt/slides/slide15.xml><?xml version="1.0" encoding="utf-8"?>
 <p:sld xmlns:a="http://schemas.openxmlformats.org/drawingml/2006/main" xmlns:r="http://schemas.openxmlformats.org/officeDocument/2006/relationships" xmlns:p="http://schemas.openxmlformats.org/presentationml/2006/main">
   <p:cSld>
     <p:spTree>
@@ -3147,7 +3579,7 @@
         </p:nvSpPr>
         <p:spPr>
           <a:xfrm>
-            <a:off x="800100" y="6945602"/>
+            <a:off x="685038" y="6627481"/>
             <a:ext cx="7507224" cy="877824"/>
           </a:xfrm>
           <a:prstGeom prst="rect">
@@ -3187,7 +3619,7 @@
                   <a:srgbClr val="333333"/>
                 </a:solidFill>
               </a:rPr>
-              <a:t>Support has ready-made assets (help_center.md, support_tickets.csv) — you can be building by 10:15.</a:t>
+              <a:t>Support has ready-made assets (help_center.md, support_tickets.csv) — you can be designing by 10:05.</a:t>
             </a:r>
           </a:p>
         </p:txBody>
@@ -3200,7 +3632,7 @@
 </p:sld>
 </file>
 
-<file path=ppt/slides/slide14.xml><?xml version="1.0" encoding="utf-8"?>
+<file path=ppt/slides/slide16.xml><?xml version="1.0" encoding="utf-8"?>
 <p:sld xmlns:a="http://schemas.openxmlformats.org/drawingml/2006/main" xmlns:r="http://schemas.openxmlformats.org/officeDocument/2006/relationships" xmlns:p="http://schemas.openxmlformats.org/presentationml/2006/main">
   <p:cSld>
     <p:spTree>
@@ -3233,7 +3665,7 @@
           <a:lstStyle/>
           <a:p>
             <a:r>
-              <a:t>Build It — Good Luck</a:t>
+              <a:t>Design It — Good Luck</a:t>
             </a:r>
           </a:p>
         </p:txBody>
@@ -3263,38 +3695,22 @@
               <a:t> labs/17-Capstone</a:t>
             </a:r>
             <a:r>
-              <a:t> — run-of-show, the</a:t>
-            </a:r>
-            <a:r>
-              <a:rPr>
-                <a:latin typeface="Courier New"/>
-              </a:rPr>
-              <a:t> starter/</a:t>
-            </a:r>
-            <a:r>
-              <a:t> scaffold, and the rubric</a:t>
-            </a:r>
-          </a:p>
-          <a:p>
-            <a:r>
-              <a:t> Design on paper first. Get one thread running. Then make it good.</a:t>
-            </a:r>
-          </a:p>
-          <a:p>
-            <a:r>
-              <a:t> Log everything. Gate the dangerous thing. Prove it with the eval set.</a:t>
-            </a:r>
-          </a:p>
-          <a:p>
-            <a:r>
-              <a:t> Demo it</a:t>
-            </a:r>
-            <a:r>
-              <a:rPr b="1"/>
-              <a:t> live</a:t>
-            </a:r>
-            <a:r>
-              <a:t> — edge case and all.</a:t>
+              <a:t> — run-of-show, the picture checklist, and the rubric</a:t>
+            </a:r>
+          </a:p>
+          <a:p>
+            <a:r>
+              <a:t> One use case. Two roles. One dangerous action. One page and one picture.</a:t>
+            </a:r>
+          </a:p>
+          <a:p>
+            <a:r>
+              <a:t> Name the approver. Name what's logged. Name the case that would fail.</a:t>
+            </a:r>
+          </a:p>
+          <a:p>
+            <a:r>
+              <a:t> Then defend it — the room gets to push back.</a:t>
             </a:r>
           </a:p>
           <a:p>
@@ -3343,7 +3759,232 @@
         </p:nvSpPr>
         <p:spPr>
           <a:xfrm>
-            <a:off x="571500" y="6874735"/>
+            <a:off x="571500" y="5825331"/>
+            <a:ext cx="7507224" cy="1755648"/>
+          </a:xfrm>
+          <a:prstGeom prst="rect">
+            <a:avLst/>
+          </a:prstGeom>
+          <a:solidFill>
+            <a:srgbClr val="F2F2F2"/>
+          </a:solidFill>
+          <a:ln>
+            <a:solidFill>
+              <a:srgbClr val="D9D9D9"/>
+            </a:solidFill>
+          </a:ln>
+        </p:spPr>
+        <p:style>
+          <a:lnRef idx="1">
+            <a:schemeClr val="accent1"/>
+          </a:lnRef>
+          <a:fillRef idx="3">
+            <a:schemeClr val="accent1"/>
+          </a:fillRef>
+          <a:effectRef idx="2">
+            <a:schemeClr val="accent1"/>
+          </a:effectRef>
+          <a:fontRef idx="minor">
+            <a:schemeClr val="lt1"/>
+          </a:fontRef>
+        </p:style>
+        <p:txBody>
+          <a:bodyPr lIns="128016" tIns="73152" rIns="128016" bIns="73152" rtlCol="0" anchor="ctr"/>
+          <a:lstStyle/>
+          <a:p>
+            <a:pPr algn="ctr"/>
+            <a:r>
+              <a:rPr sz="1800" i="1">
+                <a:solidFill>
+                  <a:srgbClr val="333333"/>
+                </a:solidFill>
+              </a:rPr>
+              <a:t>Monday: a ReAct loop with two read-only tools and a regex. Today: a governed multi-agent system you can defend. The loop never changed — you just know where the gate goes.</a:t>
+            </a:r>
+          </a:p>
+        </p:txBody>
+      </p:sp>
+    </p:spTree>
+  </p:cSld>
+  <p:clrMapOvr>
+    <a:masterClrMapping/>
+  </p:clrMapOvr>
+</p:sld>
+</file>
+
+<file path=ppt/slides/slide2.xml><?xml version="1.0" encoding="utf-8"?>
+<p:sld xmlns:a="http://schemas.openxmlformats.org/drawingml/2006/main" xmlns:r="http://schemas.openxmlformats.org/officeDocument/2006/relationships" xmlns:p="http://schemas.openxmlformats.org/presentationml/2006/main">
+  <p:cSld>
+    <p:spTree>
+      <p:nvGrpSpPr>
+        <p:cNvPr id="1" name=""/>
+        <p:cNvGrpSpPr/>
+        <p:nvPr/>
+      </p:nvGrpSpPr>
+      <p:grpSpPr>
+        <a:xfrm>
+          <a:off x="0" y="0"/>
+          <a:ext cx="0" cy="0"/>
+          <a:chOff x="0" y="0"/>
+          <a:chExt cx="0" cy="0"/>
+        </a:xfrm>
+      </p:grpSpPr>
+      <p:sp>
+        <p:nvSpPr>
+          <p:cNvPr id="2" name="Title 1"/>
+          <p:cNvSpPr>
+            <a:spLocks noGrp="1"/>
+          </p:cNvSpPr>
+          <p:nvPr>
+            <p:ph type="title"/>
+          </p:nvPr>
+        </p:nvSpPr>
+        <p:spPr/>
+        <p:txBody>
+          <a:bodyPr/>
+          <a:lstStyle/>
+          <a:p>
+            <a:r>
+              <a:t>The Challenge</a:t>
+            </a:r>
+          </a:p>
+        </p:txBody>
+      </p:sp>
+      <p:sp>
+        <p:nvSpPr>
+          <p:cNvPr id="3" name="Content Placeholder 2"/>
+          <p:cNvSpPr>
+            <a:spLocks noGrp="1"/>
+          </p:cNvSpPr>
+          <p:nvPr>
+            <p:ph idx="1"/>
+          </p:nvPr>
+        </p:nvSpPr>
+        <p:spPr/>
+        <p:txBody>
+          <a:bodyPr/>
+          <a:lstStyle/>
+          <a:p>
+            <a:r>
+              <a:t> In teams,</a:t>
+            </a:r>
+            <a:r>
+              <a:rPr b="1"/>
+              <a:t> design a multi-agent system</a:t>
+            </a:r>
+            <a:r>
+              <a:t> in one domain:</a:t>
+            </a:r>
+          </a:p>
+          <a:p>
+            <a:pPr lvl="1"/>
+            <a:r>
+              <a:rPr b="1"/>
+              <a:t> Finance</a:t>
+            </a:r>
+            <a:r>
+              <a:t> ·</a:t>
+            </a:r>
+            <a:r>
+              <a:rPr b="1"/>
+              <a:t> HR</a:t>
+            </a:r>
+            <a:r>
+              <a:t> ·</a:t>
+            </a:r>
+            <a:r>
+              <a:rPr b="1"/>
+              <a:t> Real Estate</a:t>
+            </a:r>
+            <a:r>
+              <a:t> ·</a:t>
+            </a:r>
+            <a:r>
+              <a:rPr b="1"/>
+              <a:t> Customer Support</a:t>
+            </a:r>
+          </a:p>
+          <a:p>
+            <a:r>
+              <a:t> You have one day:</a:t>
+            </a:r>
+            <a:r>
+              <a:rPr b="1"/>
+              <a:t> design → draw → pressure-test → defend</a:t>
+            </a:r>
+          </a:p>
+          <a:p>
+            <a:r>
+              <a:t> It must be a</a:t>
+            </a:r>
+            <a:r>
+              <a:rPr i="1"/>
+              <a:t> system</a:t>
+            </a:r>
+            <a:r>
+              <a:t> , not a single prompt — agents that</a:t>
+            </a:r>
+            <a:r>
+              <a:rPr b="1"/>
+              <a:t> cooperate</a:t>
+            </a:r>
+          </a:p>
+          <a:p>
+            <a:r>
+              <a:t> Everything you learned this week shows up here</a:t>
+            </a:r>
+            <a:r>
+              <a:rPr b="1"/>
+              <a:t> at least once</a:t>
+            </a:r>
+          </a:p>
+          <a:p>
+            <a:endParaRPr b="1"/>
+          </a:p>
+        </p:txBody>
+      </p:sp>
+      <p:sp>
+        <p:nvSpPr>
+          <p:cNvPr id="4" name="TextBox 3"/>
+          <p:cNvSpPr txBox="1"/>
+          <p:nvPr/>
+        </p:nvSpPr>
+        <p:spPr>
+          <a:xfrm>
+            <a:off x="704088" y="8065008"/>
+            <a:ext cx="8915400" cy="228600"/>
+          </a:xfrm>
+          <a:prstGeom prst="rect">
+            <a:avLst/>
+          </a:prstGeom>
+          <a:noFill/>
+        </p:spPr>
+        <p:txBody>
+          <a:bodyPr wrap="none">
+            <a:spAutoFit/>
+          </a:bodyPr>
+          <a:lstStyle/>
+          <a:p>
+            <a:r>
+              <a:rPr sz="800">
+                <a:solidFill>
+                  <a:srgbClr val="000000"/>
+                </a:solidFill>
+              </a:rPr>
+              <a:t>Copyright © 2026 by Elephant Scale, All Rights Reserved</a:t>
+            </a:r>
+          </a:p>
+        </p:txBody>
+      </p:sp>
+      <p:sp>
+        <p:nvSpPr>
+          <p:cNvPr id="5" name="Rectangle 4"/>
+          <p:cNvSpPr/>
+          <p:nvPr/>
+        </p:nvSpPr>
+        <p:spPr>
+          <a:xfrm>
+            <a:off x="495300" y="6945602"/>
             <a:ext cx="7507224" cy="877824"/>
           </a:xfrm>
           <a:prstGeom prst="rect">
@@ -3383,232 +4024,7 @@
                   <a:srgbClr val="333333"/>
                 </a:solidFill>
               </a:rPr>
-              <a:t>You started the week hand-building a ReAct loop. Today you ship a governed multi-agent system. Go build.</a:t>
-            </a:r>
-          </a:p>
-        </p:txBody>
-      </p:sp>
-    </p:spTree>
-  </p:cSld>
-  <p:clrMapOvr>
-    <a:masterClrMapping/>
-  </p:clrMapOvr>
-</p:sld>
-</file>
-
-<file path=ppt/slides/slide2.xml><?xml version="1.0" encoding="utf-8"?>
-<p:sld xmlns:a="http://schemas.openxmlformats.org/drawingml/2006/main" xmlns:r="http://schemas.openxmlformats.org/officeDocument/2006/relationships" xmlns:p="http://schemas.openxmlformats.org/presentationml/2006/main">
-  <p:cSld>
-    <p:spTree>
-      <p:nvGrpSpPr>
-        <p:cNvPr id="1" name=""/>
-        <p:cNvGrpSpPr/>
-        <p:nvPr/>
-      </p:nvGrpSpPr>
-      <p:grpSpPr>
-        <a:xfrm>
-          <a:off x="0" y="0"/>
-          <a:ext cx="0" cy="0"/>
-          <a:chOff x="0" y="0"/>
-          <a:chExt cx="0" cy="0"/>
-        </a:xfrm>
-      </p:grpSpPr>
-      <p:sp>
-        <p:nvSpPr>
-          <p:cNvPr id="2" name="Title 1"/>
-          <p:cNvSpPr>
-            <a:spLocks noGrp="1"/>
-          </p:cNvSpPr>
-          <p:nvPr>
-            <p:ph type="title"/>
-          </p:nvPr>
-        </p:nvSpPr>
-        <p:spPr/>
-        <p:txBody>
-          <a:bodyPr/>
-          <a:lstStyle/>
-          <a:p>
-            <a:r>
-              <a:t>The Challenge</a:t>
-            </a:r>
-          </a:p>
-        </p:txBody>
-      </p:sp>
-      <p:sp>
-        <p:nvSpPr>
-          <p:cNvPr id="3" name="Content Placeholder 2"/>
-          <p:cNvSpPr>
-            <a:spLocks noGrp="1"/>
-          </p:cNvSpPr>
-          <p:nvPr>
-            <p:ph idx="1"/>
-          </p:nvPr>
-        </p:nvSpPr>
-        <p:spPr/>
-        <p:txBody>
-          <a:bodyPr/>
-          <a:lstStyle/>
-          <a:p>
-            <a:r>
-              <a:t> In teams,</a:t>
-            </a:r>
-            <a:r>
-              <a:rPr b="1"/>
-              <a:t> design and build a multi-agent system</a:t>
-            </a:r>
-            <a:r>
-              <a:t> in one domain:</a:t>
-            </a:r>
-          </a:p>
-          <a:p>
-            <a:pPr lvl="1"/>
-            <a:r>
-              <a:rPr b="1"/>
-              <a:t> Finance</a:t>
-            </a:r>
-            <a:r>
-              <a:t> ·</a:t>
-            </a:r>
-            <a:r>
-              <a:rPr b="1"/>
-              <a:t> HR</a:t>
-            </a:r>
-            <a:r>
-              <a:t> ·</a:t>
-            </a:r>
-            <a:r>
-              <a:rPr b="1"/>
-              <a:t> Real Estate</a:t>
-            </a:r>
-            <a:r>
-              <a:t> ·</a:t>
-            </a:r>
-            <a:r>
-              <a:rPr b="1"/>
-              <a:t> Customer Support</a:t>
-            </a:r>
-          </a:p>
-          <a:p>
-            <a:r>
-              <a:t> You have one day:</a:t>
-            </a:r>
-            <a:r>
-              <a:rPr b="1"/>
-              <a:t> design → build → evaluate → demo</a:t>
-            </a:r>
-          </a:p>
-          <a:p>
-            <a:r>
-              <a:t> It must be a</a:t>
-            </a:r>
-            <a:r>
-              <a:rPr i="1"/>
-              <a:t> system</a:t>
-            </a:r>
-            <a:r>
-              <a:t> , not a single prompt — agents that</a:t>
-            </a:r>
-            <a:r>
-              <a:rPr b="1"/>
-              <a:t> cooperate</a:t>
-            </a:r>
-          </a:p>
-          <a:p>
-            <a:r>
-              <a:t> Everything you learned this week shows up here</a:t>
-            </a:r>
-            <a:r>
-              <a:rPr b="1"/>
-              <a:t> at least once</a:t>
-            </a:r>
-          </a:p>
-          <a:p>
-            <a:endParaRPr b="1"/>
-          </a:p>
-        </p:txBody>
-      </p:sp>
-      <p:sp>
-        <p:nvSpPr>
-          <p:cNvPr id="4" name="TextBox 3"/>
-          <p:cNvSpPr txBox="1"/>
-          <p:nvPr/>
-        </p:nvSpPr>
-        <p:spPr>
-          <a:xfrm>
-            <a:off x="704088" y="8065008"/>
-            <a:ext cx="8915400" cy="228600"/>
-          </a:xfrm>
-          <a:prstGeom prst="rect">
-            <a:avLst/>
-          </a:prstGeom>
-          <a:noFill/>
-        </p:spPr>
-        <p:txBody>
-          <a:bodyPr wrap="none">
-            <a:spAutoFit/>
-          </a:bodyPr>
-          <a:lstStyle/>
-          <a:p>
-            <a:r>
-              <a:rPr sz="800">
-                <a:solidFill>
-                  <a:srgbClr val="000000"/>
-                </a:solidFill>
-              </a:rPr>
-              <a:t>Copyright © 2026 by Elephant Scale, All Rights Reserved</a:t>
-            </a:r>
-          </a:p>
-        </p:txBody>
-      </p:sp>
-      <p:sp>
-        <p:nvSpPr>
-          <p:cNvPr id="5" name="Rectangle 4"/>
-          <p:cNvSpPr/>
-          <p:nvPr/>
-        </p:nvSpPr>
-        <p:spPr>
-          <a:xfrm>
-            <a:off x="571500" y="6863975"/>
-            <a:ext cx="7507224" cy="877824"/>
-          </a:xfrm>
-          <a:prstGeom prst="rect">
-            <a:avLst/>
-          </a:prstGeom>
-          <a:solidFill>
-            <a:srgbClr val="F2F2F2"/>
-          </a:solidFill>
-          <a:ln>
-            <a:solidFill>
-              <a:srgbClr val="D9D9D9"/>
-            </a:solidFill>
-          </a:ln>
-        </p:spPr>
-        <p:style>
-          <a:lnRef idx="1">
-            <a:schemeClr val="accent1"/>
-          </a:lnRef>
-          <a:fillRef idx="3">
-            <a:schemeClr val="accent1"/>
-          </a:fillRef>
-          <a:effectRef idx="2">
-            <a:schemeClr val="accent1"/>
-          </a:effectRef>
-          <a:fontRef idx="minor">
-            <a:schemeClr val="lt1"/>
-          </a:fontRef>
-        </p:style>
-        <p:txBody>
-          <a:bodyPr lIns="128016" tIns="73152" rIns="128016" bIns="73152" rtlCol="0" anchor="ctr"/>
-          <a:lstStyle/>
-          <a:p>
-            <a:pPr algn="ctr"/>
-            <a:r>
-              <a:rPr sz="1800" i="1">
-                <a:solidFill>
-                  <a:srgbClr val="333333"/>
-                </a:solidFill>
-              </a:rPr>
-              <a:t>This is the whole course in one project. Small scope, done well, beats big scope, half-built.</a:t>
+              <a:t>You are not writing code today. A design you can defend beats a demo that happens to run.</a:t>
             </a:r>
           </a:p>
         </p:txBody>
@@ -3765,14 +4181,14 @@
           <p:nvPr>
             <p:extLst>
               <p:ext uri="{D42A27DB-BD31-4B8C-83A1-F6EECF244321}">
-                <p14:modId xmlns:p14="http://schemas.microsoft.com/office/powerpoint/2010/main" val="893261191"/>
+                <p14:modId xmlns:p14="http://schemas.microsoft.com/office/powerpoint/2010/main" val="3207450752"/>
               </p:ext>
             </p:extLst>
           </p:nvPr>
         </p:nvGraphicFramePr>
         <p:xfrm>
-          <a:off x="234950" y="2286391"/>
-          <a:ext cx="8902700" cy="3462642"/>
+          <a:off x="244475" y="2228691"/>
+          <a:ext cx="8915400" cy="3840480"/>
         </p:xfrm>
         <a:graphic>
           <a:graphicData uri="http://schemas.openxmlformats.org/drawingml/2006/table">
@@ -3781,14 +4197,14 @@
                 <a:tableStyleId>{5C22544A-7EE6-4342-B048-85BDC9FD1C3A}</a:tableStyleId>
               </a:tblPr>
               <a:tblGrid>
-                <a:gridCol w="3064256">
+                <a:gridCol w="4457700">
                   <a:extLst>
                     <a:ext uri="{9D8B030D-6E8A-4147-A177-3AD203B41FA5}">
                       <a16:colId xmlns:a16="http://schemas.microsoft.com/office/drawing/2014/main" val="20000"/>
                     </a:ext>
                   </a:extLst>
                 </a:gridCol>
-                <a:gridCol w="5838444">
+                <a:gridCol w="4457700">
                   <a:extLst>
                     <a:ext uri="{9D8B030D-6E8A-4147-A177-3AD203B41FA5}">
                       <a16:colId xmlns:a16="http://schemas.microsoft.com/office/drawing/2014/main" val="20001"/>
@@ -3827,7 +4243,7 @@
                   </a:ext>
                 </a:extLst>
               </a:tr>
-              <a:tr h="516147">
+              <a:tr h="457200">
                 <a:tc>
                   <a:txBody>
                     <a:bodyPr/>
@@ -3859,7 +4275,7 @@
                   </a:ext>
                 </a:extLst>
               </a:tr>
-              <a:tr h="516147">
+              <a:tr h="457200">
                 <a:tc>
                   <a:txBody>
                     <a:bodyPr/>
@@ -3891,7 +4307,7 @@
                   </a:ext>
                 </a:extLst>
               </a:tr>
-              <a:tr h="516147">
+              <a:tr h="457200">
                 <a:tc>
                   <a:txBody>
                     <a:bodyPr/>
@@ -3923,7 +4339,7 @@
                   </a:ext>
                 </a:extLst>
               </a:tr>
-              <a:tr h="516147">
+              <a:tr h="457200">
                 <a:tc>
                   <a:txBody>
                     <a:bodyPr/>
@@ -3955,7 +4371,7 @@
                   </a:ext>
                 </a:extLst>
               </a:tr>
-              <a:tr h="516147">
+              <a:tr h="457200">
                 <a:tc>
                   <a:txBody>
                     <a:bodyPr/>
@@ -3975,7 +4391,14 @@
                     <a:lstStyle/>
                     <a:p>
                       <a:r>
-                        <a:t>A small frozen eval set + before/after scores</a:t>
+                        <a:t>5-8 </a:t>
+                      </a:r>
+                      <a:r>
+                        <a:rPr b="1"/>
+                        <a:t>named</a:t>
+                      </a:r>
+                      <a:r>
+                        <a:t> test cases, incl. one unsafe request</a:t>
                       </a:r>
                     </a:p>
                   </a:txBody>
@@ -3987,14 +4410,14 @@
                   </a:ext>
                 </a:extLst>
               </a:tr>
-              <a:tr h="516147">
+              <a:tr h="457200">
                 <a:tc>
                   <a:txBody>
                     <a:bodyPr/>
                     <a:lstStyle/>
                     <a:p>
                       <a:r>
-                        <a:rPr b="1" dirty="0"/>
+                        <a:rPr b="1"/>
                         <a:t>Governance</a:t>
                       </a:r>
                     </a:p>
@@ -4008,7 +4431,7 @@
                     <a:p>
                       <a:r>
                         <a:rPr dirty="0"/>
-                        <a:t>Audit log + human gate on dangerous actions</a:t>
+                        <a:t>A gate on the picture + what gets logged, per step</a:t>
                       </a:r>
                     </a:p>
                   </a:txBody>
@@ -4024,702 +4447,6 @@
           </a:graphicData>
         </a:graphic>
       </p:graphicFrame>
-      <p:sp>
-        <p:nvSpPr>
-          <p:cNvPr id="6" name="Rectangle 5"/>
-          <p:cNvSpPr/>
-          <p:nvPr/>
-        </p:nvSpPr>
-        <p:spPr>
-          <a:xfrm>
-            <a:off x="571500" y="7040448"/>
-            <a:ext cx="7507224" cy="877824"/>
-          </a:xfrm>
-          <a:prstGeom prst="rect">
-            <a:avLst/>
-          </a:prstGeom>
-          <a:solidFill>
-            <a:srgbClr val="F2F2F2"/>
-          </a:solidFill>
-          <a:ln>
-            <a:solidFill>
-              <a:srgbClr val="D9D9D9"/>
-            </a:solidFill>
-          </a:ln>
-        </p:spPr>
-        <p:style>
-          <a:lnRef idx="1">
-            <a:schemeClr val="accent1"/>
-          </a:lnRef>
-          <a:fillRef idx="3">
-            <a:schemeClr val="accent1"/>
-          </a:fillRef>
-          <a:effectRef idx="2">
-            <a:schemeClr val="accent1"/>
-          </a:effectRef>
-          <a:fontRef idx="minor">
-            <a:schemeClr val="lt1"/>
-          </a:fontRef>
-        </p:style>
-        <p:txBody>
-          <a:bodyPr lIns="128016" tIns="73152" rIns="128016" bIns="73152" rtlCol="0" anchor="ctr"/>
-          <a:lstStyle/>
-          <a:p>
-            <a:pPr algn="ctr"/>
-            <a:r>
-              <a:rPr sz="1800" i="1">
-                <a:solidFill>
-                  <a:srgbClr val="333333"/>
-                </a:solidFill>
-              </a:rPr>
-              <a:t>Six checkboxes. Wire all six early with one thin thread, then make each one good.</a:t>
-            </a:r>
-          </a:p>
-        </p:txBody>
-      </p:sp>
-    </p:spTree>
-  </p:cSld>
-  <p:clrMapOvr>
-    <a:masterClrMapping/>
-  </p:clrMapOvr>
-</p:sld>
-</file>
-
-<file path=ppt/slides/slide4.xml><?xml version="1.0" encoding="utf-8"?>
-<p:sld xmlns:a="http://schemas.openxmlformats.org/drawingml/2006/main" xmlns:r="http://schemas.openxmlformats.org/officeDocument/2006/relationships" xmlns:p="http://schemas.openxmlformats.org/presentationml/2006/main">
-  <p:cSld>
-    <p:spTree>
-      <p:nvGrpSpPr>
-        <p:cNvPr id="1" name=""/>
-        <p:cNvGrpSpPr/>
-        <p:nvPr/>
-      </p:nvGrpSpPr>
-      <p:grpSpPr>
-        <a:xfrm>
-          <a:off x="0" y="0"/>
-          <a:ext cx="0" cy="0"/>
-          <a:chOff x="0" y="0"/>
-          <a:chExt cx="0" cy="0"/>
-        </a:xfrm>
-      </p:grpSpPr>
-      <p:sp>
-        <p:nvSpPr>
-          <p:cNvPr id="2" name="Title 1"/>
-          <p:cNvSpPr>
-            <a:spLocks noGrp="1"/>
-          </p:cNvSpPr>
-          <p:nvPr>
-            <p:ph type="title"/>
-          </p:nvPr>
-        </p:nvSpPr>
-        <p:spPr/>
-        <p:txBody>
-          <a:bodyPr/>
-          <a:lstStyle/>
-          <a:p>
-            <a:r>
-              <a:t>Scope It With the Agent Design Canvas</a:t>
-            </a:r>
-          </a:p>
-        </p:txBody>
-      </p:sp>
-      <p:sp>
-        <p:nvSpPr>
-          <p:cNvPr id="3" name="Content Placeholder 2"/>
-          <p:cNvSpPr>
-            <a:spLocks noGrp="1"/>
-          </p:cNvSpPr>
-          <p:nvPr>
-            <p:ph idx="1"/>
-          </p:nvPr>
-        </p:nvSpPr>
-        <p:spPr/>
-        <p:txBody>
-          <a:bodyPr/>
-          <a:lstStyle/>
-          <a:p>
-            <a:r>
-              <a:rPr dirty="0"/>
-              <a:t> Fill</a:t>
-            </a:r>
-            <a:r>
-              <a:rPr dirty="0">
-                <a:latin typeface="Courier New"/>
-              </a:rPr>
-              <a:t> agent-design-</a:t>
-            </a:r>
-            <a:r>
-              <a:rPr dirty="0" err="1">
-                <a:latin typeface="Courier New"/>
-              </a:rPr>
-              <a:t>canvas.md</a:t>
-            </a:r>
-            <a:r>
-              <a:rPr dirty="0"/>
-              <a:t> </a:t>
-            </a:r>
-            <a:r>
-              <a:rPr b="1" dirty="0"/>
-              <a:t> before</a:t>
-            </a:r>
-            <a:r>
-              <a:rPr dirty="0"/>
-              <a:t> you write code — one page, seven boxes:</a:t>
-            </a:r>
-          </a:p>
-          <a:p>
-            <a:endParaRPr dirty="0"/>
-          </a:p>
-          <a:p>
-            <a:endParaRPr dirty="0"/>
-          </a:p>
-          <a:p>
-            <a:endParaRPr lang="en-US" dirty="0"/>
-          </a:p>
-          <a:p>
-            <a:endParaRPr lang="en-US" dirty="0"/>
-          </a:p>
-          <a:p>
-            <a:endParaRPr lang="en-US" dirty="0"/>
-          </a:p>
-          <a:p>
-            <a:endParaRPr dirty="0"/>
-          </a:p>
-          <a:p>
-            <a:r>
-              <a:rPr dirty="0"/>
-              <a:t> The</a:t>
-            </a:r>
-            <a:r>
-              <a:rPr b="1" dirty="0"/>
-              <a:t> "out of scope"</a:t>
-            </a:r>
-            <a:r>
-              <a:rPr dirty="0"/>
-              <a:t> line is the most valuable thing you'll write today.</a:t>
-            </a:r>
-          </a:p>
-          <a:p>
-            <a:endParaRPr dirty="0"/>
-          </a:p>
-        </p:txBody>
-      </p:sp>
-      <p:sp>
-        <p:nvSpPr>
-          <p:cNvPr id="4" name="TextBox 3"/>
-          <p:cNvSpPr txBox="1"/>
-          <p:nvPr/>
-        </p:nvSpPr>
-        <p:spPr>
-          <a:xfrm>
-            <a:off x="704088" y="8065008"/>
-            <a:ext cx="8915400" cy="228600"/>
-          </a:xfrm>
-          <a:prstGeom prst="rect">
-            <a:avLst/>
-          </a:prstGeom>
-          <a:noFill/>
-        </p:spPr>
-        <p:txBody>
-          <a:bodyPr wrap="none">
-            <a:spAutoFit/>
-          </a:bodyPr>
-          <a:lstStyle/>
-          <a:p>
-            <a:r>
-              <a:rPr sz="800">
-                <a:solidFill>
-                  <a:srgbClr val="000000"/>
-                </a:solidFill>
-              </a:rPr>
-              <a:t>Copyright © 2026 by Elephant Scale, All Rights Reserved</a:t>
-            </a:r>
-          </a:p>
-        </p:txBody>
-      </p:sp>
-      <p:pic>
-        <p:nvPicPr>
-          <p:cNvPr id="5" name="Picture 4" descr="1.png"/>
-          <p:cNvPicPr>
-            <a:picLocks noChangeAspect="1"/>
-          </p:cNvPicPr>
-          <p:nvPr/>
-        </p:nvPicPr>
-        <p:blipFill>
-          <a:blip r:embed="rId2"/>
-          <a:stretch>
-            <a:fillRect/>
-          </a:stretch>
-        </p:blipFill>
-        <p:spPr>
-          <a:xfrm>
-            <a:off x="14287" y="2404691"/>
-            <a:ext cx="9358313" cy="1744239"/>
-          </a:xfrm>
-          <a:prstGeom prst="rect">
-            <a:avLst/>
-          </a:prstGeom>
-        </p:spPr>
-      </p:pic>
-      <p:sp>
-        <p:nvSpPr>
-          <p:cNvPr id="6" name="Rectangle 5"/>
-          <p:cNvSpPr/>
-          <p:nvPr/>
-        </p:nvSpPr>
-        <p:spPr>
-          <a:xfrm>
-            <a:off x="485267" y="6978592"/>
-            <a:ext cx="7507224" cy="877824"/>
-          </a:xfrm>
-          <a:prstGeom prst="rect">
-            <a:avLst/>
-          </a:prstGeom>
-          <a:solidFill>
-            <a:srgbClr val="F2F2F2"/>
-          </a:solidFill>
-          <a:ln>
-            <a:solidFill>
-              <a:srgbClr val="D9D9D9"/>
-            </a:solidFill>
-          </a:ln>
-        </p:spPr>
-        <p:style>
-          <a:lnRef idx="1">
-            <a:schemeClr val="accent1"/>
-          </a:lnRef>
-          <a:fillRef idx="3">
-            <a:schemeClr val="accent1"/>
-          </a:fillRef>
-          <a:effectRef idx="2">
-            <a:schemeClr val="accent1"/>
-          </a:effectRef>
-          <a:fontRef idx="minor">
-            <a:schemeClr val="lt1"/>
-          </a:fontRef>
-        </p:style>
-        <p:txBody>
-          <a:bodyPr lIns="128016" tIns="73152" rIns="128016" bIns="73152" rtlCol="0" anchor="ctr"/>
-          <a:lstStyle/>
-          <a:p>
-            <a:pPr algn="ctr"/>
-            <a:r>
-              <a:rPr sz="1800" i="1">
-                <a:solidFill>
-                  <a:srgbClr val="333333"/>
-                </a:solidFill>
-              </a:rPr>
-              <a:t>A finished canvas is a scoped project. A blank canvas is a demo that dies at 4 p.m.</a:t>
-            </a:r>
-          </a:p>
-        </p:txBody>
-      </p:sp>
-    </p:spTree>
-  </p:cSld>
-  <p:clrMapOvr>
-    <a:masterClrMapping/>
-  </p:clrMapOvr>
-</p:sld>
-</file>
-
-<file path=ppt/slides/slide5.xml><?xml version="1.0" encoding="utf-8"?>
-<p:sld xmlns:a="http://schemas.openxmlformats.org/drawingml/2006/main" xmlns:r="http://schemas.openxmlformats.org/officeDocument/2006/relationships" xmlns:p="http://schemas.openxmlformats.org/presentationml/2006/main">
-  <p:cSld>
-    <p:spTree>
-      <p:nvGrpSpPr>
-        <p:cNvPr id="1" name=""/>
-        <p:cNvGrpSpPr/>
-        <p:nvPr/>
-      </p:nvGrpSpPr>
-      <p:grpSpPr>
-        <a:xfrm>
-          <a:off x="0" y="0"/>
-          <a:ext cx="0" cy="0"/>
-          <a:chOff x="0" y="0"/>
-          <a:chExt cx="0" cy="0"/>
-        </a:xfrm>
-      </p:grpSpPr>
-      <p:sp>
-        <p:nvSpPr>
-          <p:cNvPr id="2" name="Title 1"/>
-          <p:cNvSpPr>
-            <a:spLocks noGrp="1"/>
-          </p:cNvSpPr>
-          <p:nvPr>
-            <p:ph type="title"/>
-          </p:nvPr>
-        </p:nvSpPr>
-        <p:spPr/>
-        <p:txBody>
-          <a:bodyPr/>
-          <a:lstStyle/>
-          <a:p>
-            <a:r>
-              <a:t>Timeline for the Day</a:t>
-            </a:r>
-          </a:p>
-        </p:txBody>
-      </p:sp>
-      <p:sp>
-        <p:nvSpPr>
-          <p:cNvPr id="3" name="Content Placeholder 2"/>
-          <p:cNvSpPr>
-            <a:spLocks noGrp="1"/>
-          </p:cNvSpPr>
-          <p:nvPr>
-            <p:ph idx="1"/>
-          </p:nvPr>
-        </p:nvSpPr>
-        <p:spPr/>
-        <p:txBody>
-          <a:bodyPr/>
-          <a:lstStyle/>
-          <a:p>
-            <a:endParaRPr dirty="0"/>
-          </a:p>
-          <a:p>
-            <a:endParaRPr dirty="0"/>
-          </a:p>
-          <a:p>
-            <a:endParaRPr lang="en-US" dirty="0"/>
-          </a:p>
-          <a:p>
-            <a:endParaRPr lang="en-US" dirty="0"/>
-          </a:p>
-          <a:p>
-            <a:endParaRPr lang="en-US" dirty="0"/>
-          </a:p>
-          <a:p>
-            <a:endParaRPr dirty="0"/>
-          </a:p>
-          <a:p>
-            <a:r>
-              <a:rPr dirty="0"/>
-              <a:t> Use the</a:t>
-            </a:r>
-            <a:r>
-              <a:rPr dirty="0">
-                <a:latin typeface="Courier New"/>
-              </a:rPr>
-              <a:t> starter/</a:t>
-            </a:r>
-            <a:r>
-              <a:rPr dirty="0"/>
-              <a:t> scaffold in</a:t>
-            </a:r>
-            <a:r>
-              <a:rPr dirty="0">
-                <a:latin typeface="Courier New"/>
-              </a:rPr>
-              <a:t> labs/17-Capstone</a:t>
-            </a:r>
-            <a:r>
-              <a:rPr dirty="0"/>
-              <a:t> so hour one isn't plumbing.</a:t>
-            </a:r>
-          </a:p>
-          <a:p>
-            <a:endParaRPr dirty="0"/>
-          </a:p>
-        </p:txBody>
-      </p:sp>
-      <p:sp>
-        <p:nvSpPr>
-          <p:cNvPr id="4" name="TextBox 3"/>
-          <p:cNvSpPr txBox="1"/>
-          <p:nvPr/>
-        </p:nvSpPr>
-        <p:spPr>
-          <a:xfrm>
-            <a:off x="704088" y="8065008"/>
-            <a:ext cx="8915400" cy="228600"/>
-          </a:xfrm>
-          <a:prstGeom prst="rect">
-            <a:avLst/>
-          </a:prstGeom>
-          <a:noFill/>
-        </p:spPr>
-        <p:txBody>
-          <a:bodyPr wrap="none">
-            <a:spAutoFit/>
-          </a:bodyPr>
-          <a:lstStyle/>
-          <a:p>
-            <a:r>
-              <a:rPr sz="800">
-                <a:solidFill>
-                  <a:srgbClr val="000000"/>
-                </a:solidFill>
-              </a:rPr>
-              <a:t>Copyright © 2026 by Elephant Scale, All Rights Reserved</a:t>
-            </a:r>
-          </a:p>
-        </p:txBody>
-      </p:sp>
-      <p:pic>
-        <p:nvPicPr>
-          <p:cNvPr id="5" name="Picture 4" descr="1.png"/>
-          <p:cNvPicPr>
-            <a:picLocks noChangeAspect="1"/>
-          </p:cNvPicPr>
-          <p:nvPr/>
-        </p:nvPicPr>
-        <p:blipFill>
-          <a:blip r:embed="rId2"/>
-          <a:stretch>
-            <a:fillRect/>
-          </a:stretch>
-        </p:blipFill>
-        <p:spPr>
-          <a:xfrm>
-            <a:off x="222250" y="1474555"/>
-            <a:ext cx="8915400" cy="1630443"/>
-          </a:xfrm>
-          <a:prstGeom prst="rect">
-            <a:avLst/>
-          </a:prstGeom>
-        </p:spPr>
-      </p:pic>
-      <p:sp>
-        <p:nvSpPr>
-          <p:cNvPr id="6" name="Rectangle 5"/>
-          <p:cNvSpPr/>
-          <p:nvPr/>
-        </p:nvSpPr>
-        <p:spPr>
-          <a:xfrm>
-            <a:off x="571500" y="6872450"/>
-            <a:ext cx="7507224" cy="877824"/>
-          </a:xfrm>
-          <a:prstGeom prst="rect">
-            <a:avLst/>
-          </a:prstGeom>
-          <a:solidFill>
-            <a:srgbClr val="F2F2F2"/>
-          </a:solidFill>
-          <a:ln>
-            <a:solidFill>
-              <a:srgbClr val="D9D9D9"/>
-            </a:solidFill>
-          </a:ln>
-        </p:spPr>
-        <p:style>
-          <a:lnRef idx="1">
-            <a:schemeClr val="accent1"/>
-          </a:lnRef>
-          <a:fillRef idx="3">
-            <a:schemeClr val="accent1"/>
-          </a:fillRef>
-          <a:effectRef idx="2">
-            <a:schemeClr val="accent1"/>
-          </a:effectRef>
-          <a:fontRef idx="minor">
-            <a:schemeClr val="lt1"/>
-          </a:fontRef>
-        </p:style>
-        <p:txBody>
-          <a:bodyPr lIns="128016" tIns="73152" rIns="128016" bIns="73152" rtlCol="0" anchor="ctr"/>
-          <a:lstStyle/>
-          <a:p>
-            <a:pPr algn="ctr"/>
-            <a:r>
-              <a:rPr sz="1800" i="1">
-                <a:solidFill>
-                  <a:srgbClr val="333333"/>
-                </a:solidFill>
-              </a:rPr>
-              <a:t>Hit "end-to-end but ugly" by lunch. Everything after lunch is making it good, not making it work.</a:t>
-            </a:r>
-          </a:p>
-        </p:txBody>
-      </p:sp>
-    </p:spTree>
-  </p:cSld>
-  <p:clrMapOvr>
-    <a:masterClrMapping/>
-  </p:clrMapOvr>
-</p:sld>
-</file>
-
-<file path=ppt/slides/slide6.xml><?xml version="1.0" encoding="utf-8"?>
-<p:sld xmlns:a="http://schemas.openxmlformats.org/drawingml/2006/main" xmlns:r="http://schemas.openxmlformats.org/officeDocument/2006/relationships" xmlns:p="http://schemas.openxmlformats.org/presentationml/2006/main">
-  <p:cSld>
-    <p:spTree>
-      <p:nvGrpSpPr>
-        <p:cNvPr id="1" name=""/>
-        <p:cNvGrpSpPr/>
-        <p:nvPr/>
-      </p:nvGrpSpPr>
-      <p:grpSpPr>
-        <a:xfrm>
-          <a:off x="0" y="0"/>
-          <a:ext cx="0" cy="0"/>
-          <a:chOff x="0" y="0"/>
-          <a:chExt cx="0" cy="0"/>
-        </a:xfrm>
-      </p:grpSpPr>
-      <p:sp>
-        <p:nvSpPr>
-          <p:cNvPr id="2" name="Title 1"/>
-          <p:cNvSpPr>
-            <a:spLocks noGrp="1"/>
-          </p:cNvSpPr>
-          <p:nvPr>
-            <p:ph type="title"/>
-          </p:nvPr>
-        </p:nvSpPr>
-        <p:spPr/>
-        <p:txBody>
-          <a:bodyPr/>
-          <a:lstStyle/>
-          <a:p>
-            <a:r>
-              <a:t>The Demo Format (10 min / team)</a:t>
-            </a:r>
-          </a:p>
-        </p:txBody>
-      </p:sp>
-      <p:sp>
-        <p:nvSpPr>
-          <p:cNvPr id="3" name="Content Placeholder 2"/>
-          <p:cNvSpPr>
-            <a:spLocks noGrp="1"/>
-          </p:cNvSpPr>
-          <p:nvPr>
-            <p:ph idx="1"/>
-          </p:nvPr>
-        </p:nvSpPr>
-        <p:spPr/>
-        <p:txBody>
-          <a:bodyPr/>
-          <a:lstStyle/>
-          <a:p>
-            <a:r>
-              <a:rPr dirty="0"/>
-              <a:t> From</a:t>
-            </a:r>
-            <a:r>
-              <a:rPr dirty="0">
-                <a:latin typeface="Courier New"/>
-              </a:rPr>
-              <a:t> capstone-</a:t>
-            </a:r>
-            <a:r>
-              <a:rPr dirty="0" err="1">
-                <a:latin typeface="Courier New"/>
-              </a:rPr>
-              <a:t>rubric.md</a:t>
-            </a:r>
-            <a:r>
-              <a:rPr dirty="0"/>
-              <a:t> :</a:t>
-            </a:r>
-          </a:p>
-          <a:p>
-            <a:endParaRPr dirty="0"/>
-          </a:p>
-          <a:p>
-            <a:endParaRPr lang="en-US" dirty="0"/>
-          </a:p>
-          <a:p>
-            <a:endParaRPr lang="en-US" dirty="0"/>
-          </a:p>
-          <a:p>
-            <a:endParaRPr lang="en-US" dirty="0"/>
-          </a:p>
-          <a:p>
-            <a:endParaRPr dirty="0"/>
-          </a:p>
-          <a:p>
-            <a:r>
-              <a:rPr dirty="0"/>
-              <a:t> Show the</a:t>
-            </a:r>
-            <a:r>
-              <a:rPr b="1" dirty="0"/>
-              <a:t> audit log</a:t>
-            </a:r>
-            <a:r>
-              <a:rPr dirty="0"/>
-              <a:t> live — reviewers grade the</a:t>
-            </a:r>
-            <a:r>
-              <a:rPr i="1" dirty="0"/>
-              <a:t> process</a:t>
-            </a:r>
-            <a:r>
-              <a:rPr dirty="0"/>
-              <a:t> , not just the answer.</a:t>
-            </a:r>
-          </a:p>
-          <a:p>
-            <a:r>
-              <a:rPr dirty="0"/>
-              <a:t> A handled edge case earns more than a flawless happy path.</a:t>
-            </a:r>
-          </a:p>
-          <a:p>
-            <a:endParaRPr dirty="0"/>
-          </a:p>
-        </p:txBody>
-      </p:sp>
-      <p:sp>
-        <p:nvSpPr>
-          <p:cNvPr id="4" name="TextBox 3"/>
-          <p:cNvSpPr txBox="1"/>
-          <p:nvPr/>
-        </p:nvSpPr>
-        <p:spPr>
-          <a:xfrm>
-            <a:off x="704088" y="8065008"/>
-            <a:ext cx="8915400" cy="228600"/>
-          </a:xfrm>
-          <a:prstGeom prst="rect">
-            <a:avLst/>
-          </a:prstGeom>
-          <a:noFill/>
-        </p:spPr>
-        <p:txBody>
-          <a:bodyPr wrap="none">
-            <a:spAutoFit/>
-          </a:bodyPr>
-          <a:lstStyle/>
-          <a:p>
-            <a:r>
-              <a:rPr sz="800">
-                <a:solidFill>
-                  <a:srgbClr val="000000"/>
-                </a:solidFill>
-              </a:rPr>
-              <a:t>Copyright © 2026 by Elephant Scale, All Rights Reserved</a:t>
-            </a:r>
-          </a:p>
-        </p:txBody>
-      </p:sp>
-      <p:pic>
-        <p:nvPicPr>
-          <p:cNvPr id="5" name="Picture 4" descr="1.png"/>
-          <p:cNvPicPr>
-            <a:picLocks noChangeAspect="1"/>
-          </p:cNvPicPr>
-          <p:nvPr/>
-        </p:nvPicPr>
-        <p:blipFill>
-          <a:blip r:embed="rId2"/>
-          <a:stretch>
-            <a:fillRect/>
-          </a:stretch>
-        </p:blipFill>
-        <p:spPr>
-          <a:xfrm>
-            <a:off x="9525" y="1806829"/>
-            <a:ext cx="9363075" cy="1148302"/>
-          </a:xfrm>
-          <a:prstGeom prst="rect">
-            <a:avLst/>
-          </a:prstGeom>
-        </p:spPr>
-      </p:pic>
       <p:sp>
         <p:nvSpPr>
           <p:cNvPr id="6" name="Rectangle 5"/>
@@ -4768,7 +4495,717 @@
                   <a:srgbClr val="333333"/>
                 </a:solidFill>
               </a:rPr>
-              <a:t>Don't narrate what it would do. Run it, break it on purpose, and show the gate catching it.</a:t>
+              <a:t>Six checkboxes — and every one of them has to be visible on your picture.</a:t>
+            </a:r>
+          </a:p>
+        </p:txBody>
+      </p:sp>
+    </p:spTree>
+  </p:cSld>
+  <p:clrMapOvr>
+    <a:masterClrMapping/>
+  </p:clrMapOvr>
+</p:sld>
+</file>
+
+<file path=ppt/slides/slide4.xml><?xml version="1.0" encoding="utf-8"?>
+<p:sld xmlns:a="http://schemas.openxmlformats.org/drawingml/2006/main" xmlns:r="http://schemas.openxmlformats.org/officeDocument/2006/relationships" xmlns:p="http://schemas.openxmlformats.org/presentationml/2006/main">
+  <p:cSld>
+    <p:spTree>
+      <p:nvGrpSpPr>
+        <p:cNvPr id="1" name=""/>
+        <p:cNvGrpSpPr/>
+        <p:nvPr/>
+      </p:nvGrpSpPr>
+      <p:grpSpPr>
+        <a:xfrm>
+          <a:off x="0" y="0"/>
+          <a:ext cx="0" cy="0"/>
+          <a:chOff x="0" y="0"/>
+          <a:chExt cx="0" cy="0"/>
+        </a:xfrm>
+      </p:grpSpPr>
+      <p:sp>
+        <p:nvSpPr>
+          <p:cNvPr id="2" name="Title 1"/>
+          <p:cNvSpPr>
+            <a:spLocks noGrp="1"/>
+          </p:cNvSpPr>
+          <p:nvPr>
+            <p:ph type="title"/>
+          </p:nvPr>
+        </p:nvSpPr>
+        <p:spPr/>
+        <p:txBody>
+          <a:bodyPr/>
+          <a:lstStyle/>
+          <a:p>
+            <a:r>
+              <a:t>Scope It With the Agent Design Canvas</a:t>
+            </a:r>
+          </a:p>
+        </p:txBody>
+      </p:sp>
+      <p:sp>
+        <p:nvSpPr>
+          <p:cNvPr id="3" name="Content Placeholder 2"/>
+          <p:cNvSpPr>
+            <a:spLocks noGrp="1"/>
+          </p:cNvSpPr>
+          <p:nvPr>
+            <p:ph idx="1"/>
+          </p:nvPr>
+        </p:nvSpPr>
+        <p:spPr/>
+        <p:txBody>
+          <a:bodyPr/>
+          <a:lstStyle/>
+          <a:p>
+            <a:r>
+              <a:rPr dirty="0"/>
+              <a:t> Fill</a:t>
+            </a:r>
+            <a:r>
+              <a:rPr dirty="0">
+                <a:latin typeface="Courier New"/>
+              </a:rPr>
+              <a:t> agent-design-</a:t>
+            </a:r>
+            <a:r>
+              <a:rPr dirty="0" err="1">
+                <a:latin typeface="Courier New"/>
+              </a:rPr>
+              <a:t>canvas.md</a:t>
+            </a:r>
+            <a:r>
+              <a:rPr dirty="0"/>
+              <a:t> —</a:t>
+            </a:r>
+            <a:r>
+              <a:rPr b="1" dirty="0"/>
+              <a:t> this is the deliverable.</a:t>
+            </a:r>
+            <a:r>
+              <a:rPr dirty="0"/>
+              <a:t> One page, seven boxes:</a:t>
+            </a:r>
+          </a:p>
+          <a:p>
+            <a:endParaRPr dirty="0"/>
+          </a:p>
+          <a:p>
+            <a:endParaRPr dirty="0"/>
+          </a:p>
+          <a:p>
+            <a:endParaRPr lang="en-US" dirty="0"/>
+          </a:p>
+          <a:p>
+            <a:endParaRPr lang="en-US" dirty="0"/>
+          </a:p>
+          <a:p>
+            <a:endParaRPr dirty="0"/>
+          </a:p>
+          <a:p>
+            <a:r>
+              <a:rPr dirty="0"/>
+              <a:t> The</a:t>
+            </a:r>
+            <a:r>
+              <a:rPr b="1" dirty="0"/>
+              <a:t> "out of scope"</a:t>
+            </a:r>
+            <a:r>
+              <a:rPr dirty="0"/>
+              <a:t> line is the most valuable thing you'll write today.</a:t>
+            </a:r>
+          </a:p>
+          <a:p>
+            <a:r>
+              <a:rPr dirty="0"/>
+              <a:t> Strong teams have a</a:t>
+            </a:r>
+            <a:r>
+              <a:rPr b="1" dirty="0"/>
+              <a:t> longer out-of-scope list than feature list</a:t>
+            </a:r>
+            <a:r>
+              <a:rPr dirty="0"/>
+              <a:t> .</a:t>
+            </a:r>
+          </a:p>
+          <a:p>
+            <a:endParaRPr dirty="0"/>
+          </a:p>
+        </p:txBody>
+      </p:sp>
+      <p:sp>
+        <p:nvSpPr>
+          <p:cNvPr id="4" name="TextBox 3"/>
+          <p:cNvSpPr txBox="1"/>
+          <p:nvPr/>
+        </p:nvSpPr>
+        <p:spPr>
+          <a:xfrm>
+            <a:off x="704088" y="8065008"/>
+            <a:ext cx="8915400" cy="228600"/>
+          </a:xfrm>
+          <a:prstGeom prst="rect">
+            <a:avLst/>
+          </a:prstGeom>
+          <a:noFill/>
+        </p:spPr>
+        <p:txBody>
+          <a:bodyPr wrap="none">
+            <a:spAutoFit/>
+          </a:bodyPr>
+          <a:lstStyle/>
+          <a:p>
+            <a:r>
+              <a:rPr sz="800">
+                <a:solidFill>
+                  <a:srgbClr val="000000"/>
+                </a:solidFill>
+              </a:rPr>
+              <a:t>Copyright © 2026 by Elephant Scale, All Rights Reserved</a:t>
+            </a:r>
+          </a:p>
+        </p:txBody>
+      </p:sp>
+      <p:pic>
+        <p:nvPicPr>
+          <p:cNvPr id="5" name="Picture 4" descr="1.png"/>
+          <p:cNvPicPr>
+            <a:picLocks noChangeAspect="1"/>
+          </p:cNvPicPr>
+          <p:nvPr/>
+        </p:nvPicPr>
+        <p:blipFill>
+          <a:blip r:embed="rId2"/>
+          <a:stretch>
+            <a:fillRect/>
+          </a:stretch>
+        </p:blipFill>
+        <p:spPr>
+          <a:xfrm>
+            <a:off x="23812" y="2091531"/>
+            <a:ext cx="9335032" cy="1739900"/>
+          </a:xfrm>
+          <a:prstGeom prst="rect">
+            <a:avLst/>
+          </a:prstGeom>
+        </p:spPr>
+      </p:pic>
+      <p:sp>
+        <p:nvSpPr>
+          <p:cNvPr id="6" name="Rectangle 5"/>
+          <p:cNvSpPr/>
+          <p:nvPr/>
+        </p:nvSpPr>
+        <p:spPr>
+          <a:xfrm>
+            <a:off x="419100" y="6979733"/>
+            <a:ext cx="7507224" cy="877824"/>
+          </a:xfrm>
+          <a:prstGeom prst="rect">
+            <a:avLst/>
+          </a:prstGeom>
+          <a:solidFill>
+            <a:srgbClr val="F2F2F2"/>
+          </a:solidFill>
+          <a:ln>
+            <a:solidFill>
+              <a:srgbClr val="D9D9D9"/>
+            </a:solidFill>
+          </a:ln>
+        </p:spPr>
+        <p:style>
+          <a:lnRef idx="1">
+            <a:schemeClr val="accent1"/>
+          </a:lnRef>
+          <a:fillRef idx="3">
+            <a:schemeClr val="accent1"/>
+          </a:fillRef>
+          <a:effectRef idx="2">
+            <a:schemeClr val="accent1"/>
+          </a:effectRef>
+          <a:fontRef idx="minor">
+            <a:schemeClr val="lt1"/>
+          </a:fontRef>
+        </p:style>
+        <p:txBody>
+          <a:bodyPr lIns="128016" tIns="73152" rIns="128016" bIns="73152" rtlCol="0" anchor="ctr"/>
+          <a:lstStyle/>
+          <a:p>
+            <a:pPr algn="ctr"/>
+            <a:r>
+              <a:rPr sz="1800" i="1">
+                <a:solidFill>
+                  <a:srgbClr val="333333"/>
+                </a:solidFill>
+              </a:rPr>
+              <a:t>A finished canvas is a scoped project. A blank canvas is a team still arguing about features.</a:t>
+            </a:r>
+          </a:p>
+        </p:txBody>
+      </p:sp>
+    </p:spTree>
+  </p:cSld>
+  <p:clrMapOvr>
+    <a:masterClrMapping/>
+  </p:clrMapOvr>
+</p:sld>
+</file>
+
+<file path=ppt/slides/slide5.xml><?xml version="1.0" encoding="utf-8"?>
+<p:sld xmlns:a="http://schemas.openxmlformats.org/drawingml/2006/main" xmlns:r="http://schemas.openxmlformats.org/officeDocument/2006/relationships" xmlns:p="http://schemas.openxmlformats.org/presentationml/2006/main">
+  <p:cSld>
+    <p:spTree>
+      <p:nvGrpSpPr>
+        <p:cNvPr id="1" name=""/>
+        <p:cNvGrpSpPr/>
+        <p:nvPr/>
+      </p:nvGrpSpPr>
+      <p:grpSpPr>
+        <a:xfrm>
+          <a:off x="0" y="0"/>
+          <a:ext cx="0" cy="0"/>
+          <a:chOff x="0" y="0"/>
+          <a:chExt cx="0" cy="0"/>
+        </a:xfrm>
+      </p:grpSpPr>
+      <p:sp>
+        <p:nvSpPr>
+          <p:cNvPr id="2" name="Title 1"/>
+          <p:cNvSpPr>
+            <a:spLocks noGrp="1"/>
+          </p:cNvSpPr>
+          <p:nvPr>
+            <p:ph type="title"/>
+          </p:nvPr>
+        </p:nvSpPr>
+        <p:spPr/>
+        <p:txBody>
+          <a:bodyPr/>
+          <a:lstStyle/>
+          <a:p>
+            <a:r>
+              <a:t>Deliverable 2 — The Picture</a:t>
+            </a:r>
+          </a:p>
+        </p:txBody>
+      </p:sp>
+      <p:sp>
+        <p:nvSpPr>
+          <p:cNvPr id="3" name="Content Placeholder 2"/>
+          <p:cNvSpPr>
+            <a:spLocks noGrp="1"/>
+          </p:cNvSpPr>
+          <p:nvPr>
+            <p:ph idx="1"/>
+          </p:nvPr>
+        </p:nvSpPr>
+        <p:spPr/>
+        <p:txBody>
+          <a:bodyPr/>
+          <a:lstStyle/>
+          <a:p>
+            <a:r>
+              <a:rPr b="1" dirty="0"/>
+              <a:t> One diagram</a:t>
+            </a:r>
+            <a:r>
+              <a:rPr dirty="0"/>
+              <a:t> , and it has to carry all six capabilities:</a:t>
+            </a:r>
+          </a:p>
+          <a:p>
+            <a:endParaRPr dirty="0"/>
+          </a:p>
+          <a:p>
+            <a:endParaRPr lang="en-US" dirty="0"/>
+          </a:p>
+          <a:p>
+            <a:endParaRPr dirty="0"/>
+          </a:p>
+          <a:p>
+            <a:endParaRPr dirty="0"/>
+          </a:p>
+          <a:p>
+            <a:r>
+              <a:rPr dirty="0"/>
+              <a:t> Draw it</a:t>
+            </a:r>
+            <a:r>
+              <a:rPr b="1" dirty="0"/>
+              <a:t> as text</a:t>
+            </a:r>
+            <a:r>
+              <a:rPr dirty="0"/>
+              <a:t> so it lives inside your canvas — ASCII, or Mermaid pasted into</a:t>
+            </a:r>
+            <a:r>
+              <a:rPr dirty="0">
+                <a:latin typeface="Courier New"/>
+              </a:rPr>
+              <a:t> </a:t>
+            </a:r>
+            <a:r>
+              <a:rPr dirty="0" err="1">
+                <a:latin typeface="Courier New"/>
+              </a:rPr>
+              <a:t>mermaid.live</a:t>
+            </a:r>
+            <a:r>
+              <a:rPr dirty="0"/>
+              <a:t> . Same text-becomes-picture trick as Lab 9's</a:t>
+            </a:r>
+            <a:r>
+              <a:rPr dirty="0">
+                <a:latin typeface="Courier New"/>
+              </a:rPr>
+              <a:t> </a:t>
+            </a:r>
+            <a:r>
+              <a:rPr dirty="0" err="1">
+                <a:latin typeface="Courier New"/>
+              </a:rPr>
+              <a:t>graph.md</a:t>
+            </a:r>
+            <a:r>
+              <a:rPr dirty="0"/>
+              <a:t> .</a:t>
+            </a:r>
+          </a:p>
+          <a:p>
+            <a:endParaRPr dirty="0"/>
+          </a:p>
+        </p:txBody>
+      </p:sp>
+      <p:sp>
+        <p:nvSpPr>
+          <p:cNvPr id="4" name="TextBox 3"/>
+          <p:cNvSpPr txBox="1"/>
+          <p:nvPr/>
+        </p:nvSpPr>
+        <p:spPr>
+          <a:xfrm>
+            <a:off x="704088" y="8065008"/>
+            <a:ext cx="8915400" cy="228600"/>
+          </a:xfrm>
+          <a:prstGeom prst="rect">
+            <a:avLst/>
+          </a:prstGeom>
+          <a:noFill/>
+        </p:spPr>
+        <p:txBody>
+          <a:bodyPr wrap="none">
+            <a:spAutoFit/>
+          </a:bodyPr>
+          <a:lstStyle/>
+          <a:p>
+            <a:r>
+              <a:rPr sz="800">
+                <a:solidFill>
+                  <a:srgbClr val="000000"/>
+                </a:solidFill>
+              </a:rPr>
+              <a:t>Copyright © 2026 by Elephant Scale, All Rights Reserved</a:t>
+            </a:r>
+          </a:p>
+        </p:txBody>
+      </p:sp>
+      <p:pic>
+        <p:nvPicPr>
+          <p:cNvPr id="5" name="Picture 4" descr="1.png"/>
+          <p:cNvPicPr>
+            <a:picLocks noChangeAspect="1"/>
+          </p:cNvPicPr>
+          <p:nvPr/>
+        </p:nvPicPr>
+        <p:blipFill>
+          <a:blip r:embed="rId2"/>
+          <a:stretch>
+            <a:fillRect/>
+          </a:stretch>
+        </p:blipFill>
+        <p:spPr>
+          <a:xfrm>
+            <a:off x="114300" y="1634331"/>
+            <a:ext cx="8915400" cy="1296463"/>
+          </a:xfrm>
+          <a:prstGeom prst="rect">
+            <a:avLst/>
+          </a:prstGeom>
+        </p:spPr>
+      </p:pic>
+      <p:sp>
+        <p:nvSpPr>
+          <p:cNvPr id="6" name="Rectangle 5"/>
+          <p:cNvSpPr/>
+          <p:nvPr/>
+        </p:nvSpPr>
+        <p:spPr>
+          <a:xfrm>
+            <a:off x="495300" y="6863975"/>
+            <a:ext cx="7507224" cy="877824"/>
+          </a:xfrm>
+          <a:prstGeom prst="rect">
+            <a:avLst/>
+          </a:prstGeom>
+          <a:solidFill>
+            <a:srgbClr val="F2F2F2"/>
+          </a:solidFill>
+          <a:ln>
+            <a:solidFill>
+              <a:srgbClr val="D9D9D9"/>
+            </a:solidFill>
+          </a:ln>
+        </p:spPr>
+        <p:style>
+          <a:lnRef idx="1">
+            <a:schemeClr val="accent1"/>
+          </a:lnRef>
+          <a:fillRef idx="3">
+            <a:schemeClr val="accent1"/>
+          </a:fillRef>
+          <a:effectRef idx="2">
+            <a:schemeClr val="accent1"/>
+          </a:effectRef>
+          <a:fontRef idx="minor">
+            <a:schemeClr val="lt1"/>
+          </a:fontRef>
+        </p:style>
+        <p:txBody>
+          <a:bodyPr lIns="128016" tIns="73152" rIns="128016" bIns="73152" rtlCol="0" anchor="ctr"/>
+          <a:lstStyle/>
+          <a:p>
+            <a:pPr algn="ctr"/>
+            <a:r>
+              <a:rPr sz="1800" i="1">
+                <a:solidFill>
+                  <a:srgbClr val="333333"/>
+                </a:solidFill>
+              </a:rPr>
+              <a:t>If a capability is not visible on the picture, you have not designed it yet.</a:t>
+            </a:r>
+          </a:p>
+        </p:txBody>
+      </p:sp>
+    </p:spTree>
+  </p:cSld>
+  <p:clrMapOvr>
+    <a:masterClrMapping/>
+  </p:clrMapOvr>
+</p:sld>
+</file>
+
+<file path=ppt/slides/slide6.xml><?xml version="1.0" encoding="utf-8"?>
+<p:sld xmlns:a="http://schemas.openxmlformats.org/drawingml/2006/main" xmlns:r="http://schemas.openxmlformats.org/officeDocument/2006/relationships" xmlns:p="http://schemas.openxmlformats.org/presentationml/2006/main">
+  <p:cSld>
+    <p:spTree>
+      <p:nvGrpSpPr>
+        <p:cNvPr id="1" name=""/>
+        <p:cNvGrpSpPr/>
+        <p:nvPr/>
+      </p:nvGrpSpPr>
+      <p:grpSpPr>
+        <a:xfrm>
+          <a:off x="0" y="0"/>
+          <a:ext cx="0" cy="0"/>
+          <a:chOff x="0" y="0"/>
+          <a:chExt cx="0" cy="0"/>
+        </a:xfrm>
+      </p:grpSpPr>
+      <p:sp>
+        <p:nvSpPr>
+          <p:cNvPr id="2" name="Title 1"/>
+          <p:cNvSpPr>
+            <a:spLocks noGrp="1"/>
+          </p:cNvSpPr>
+          <p:nvPr>
+            <p:ph type="title"/>
+          </p:nvPr>
+        </p:nvSpPr>
+        <p:spPr/>
+        <p:txBody>
+          <a:bodyPr/>
+          <a:lstStyle/>
+          <a:p>
+            <a:r>
+              <a:t>Run-of-Show</a:t>
+            </a:r>
+          </a:p>
+        </p:txBody>
+      </p:sp>
+      <p:sp>
+        <p:nvSpPr>
+          <p:cNvPr id="3" name="Content Placeholder 2"/>
+          <p:cNvSpPr>
+            <a:spLocks noGrp="1"/>
+          </p:cNvSpPr>
+          <p:nvPr>
+            <p:ph idx="1"/>
+          </p:nvPr>
+        </p:nvSpPr>
+        <p:spPr/>
+        <p:txBody>
+          <a:bodyPr/>
+          <a:lstStyle/>
+          <a:p>
+            <a:endParaRPr dirty="0"/>
+          </a:p>
+          <a:p>
+            <a:endParaRPr dirty="0"/>
+          </a:p>
+          <a:p>
+            <a:endParaRPr lang="en-US" dirty="0"/>
+          </a:p>
+          <a:p>
+            <a:endParaRPr lang="en-US" dirty="0"/>
+          </a:p>
+          <a:p>
+            <a:endParaRPr lang="en-US" dirty="0"/>
+          </a:p>
+          <a:p>
+            <a:endParaRPr dirty="0"/>
+          </a:p>
+          <a:p>
+            <a:r>
+              <a:rPr dirty="0">
+                <a:latin typeface="Courier New"/>
+              </a:rPr>
+              <a:t> starter/</a:t>
+            </a:r>
+            <a:r>
+              <a:rPr dirty="0" err="1">
+                <a:latin typeface="Courier New"/>
+              </a:rPr>
+              <a:t>agent_scaffold.py</a:t>
+            </a:r>
+            <a:r>
+              <a:rPr dirty="0"/>
+              <a:t> is</a:t>
+            </a:r>
+            <a:r>
+              <a:rPr b="1" dirty="0"/>
+              <a:t> reference reading</a:t>
+            </a:r>
+            <a:r>
+              <a:rPr dirty="0"/>
+              <a:t> — use it to check your design is buildable.</a:t>
+            </a:r>
+          </a:p>
+          <a:p>
+            <a:endParaRPr dirty="0"/>
+          </a:p>
+        </p:txBody>
+      </p:sp>
+      <p:sp>
+        <p:nvSpPr>
+          <p:cNvPr id="4" name="TextBox 3"/>
+          <p:cNvSpPr txBox="1"/>
+          <p:nvPr/>
+        </p:nvSpPr>
+        <p:spPr>
+          <a:xfrm>
+            <a:off x="704088" y="8065008"/>
+            <a:ext cx="8915400" cy="228600"/>
+          </a:xfrm>
+          <a:prstGeom prst="rect">
+            <a:avLst/>
+          </a:prstGeom>
+          <a:noFill/>
+        </p:spPr>
+        <p:txBody>
+          <a:bodyPr wrap="none">
+            <a:spAutoFit/>
+          </a:bodyPr>
+          <a:lstStyle/>
+          <a:p>
+            <a:r>
+              <a:rPr sz="800">
+                <a:solidFill>
+                  <a:srgbClr val="000000"/>
+                </a:solidFill>
+              </a:rPr>
+              <a:t>Copyright © 2026 by Elephant Scale, All Rights Reserved</a:t>
+            </a:r>
+          </a:p>
+        </p:txBody>
+      </p:sp>
+      <p:pic>
+        <p:nvPicPr>
+          <p:cNvPr id="5" name="Picture 4" descr="1.png"/>
+          <p:cNvPicPr>
+            <a:picLocks noChangeAspect="1"/>
+          </p:cNvPicPr>
+          <p:nvPr/>
+        </p:nvPicPr>
+        <p:blipFill>
+          <a:blip r:embed="rId2"/>
+          <a:stretch>
+            <a:fillRect/>
+          </a:stretch>
+        </p:blipFill>
+        <p:spPr>
+          <a:xfrm>
+            <a:off x="457200" y="1408865"/>
+            <a:ext cx="8915400" cy="1611630"/>
+          </a:xfrm>
+          <a:prstGeom prst="rect">
+            <a:avLst/>
+          </a:prstGeom>
+        </p:spPr>
+      </p:pic>
+      <p:sp>
+        <p:nvSpPr>
+          <p:cNvPr id="6" name="Rectangle 5"/>
+          <p:cNvSpPr/>
+          <p:nvPr/>
+        </p:nvSpPr>
+        <p:spPr>
+          <a:xfrm>
+            <a:off x="234950" y="6627481"/>
+            <a:ext cx="7507224" cy="877824"/>
+          </a:xfrm>
+          <a:prstGeom prst="rect">
+            <a:avLst/>
+          </a:prstGeom>
+          <a:solidFill>
+            <a:srgbClr val="F2F2F2"/>
+          </a:solidFill>
+          <a:ln>
+            <a:solidFill>
+              <a:srgbClr val="D9D9D9"/>
+            </a:solidFill>
+          </a:ln>
+        </p:spPr>
+        <p:style>
+          <a:lnRef idx="1">
+            <a:schemeClr val="accent1"/>
+          </a:lnRef>
+          <a:fillRef idx="3">
+            <a:schemeClr val="accent1"/>
+          </a:fillRef>
+          <a:effectRef idx="2">
+            <a:schemeClr val="accent1"/>
+          </a:effectRef>
+          <a:fontRef idx="minor">
+            <a:schemeClr val="lt1"/>
+          </a:fontRef>
+        </p:style>
+        <p:txBody>
+          <a:bodyPr lIns="128016" tIns="73152" rIns="128016" bIns="73152" rtlCol="0" anchor="ctr"/>
+          <a:lstStyle/>
+          <a:p>
+            <a:pPr algn="ctr"/>
+            <a:r>
+              <a:rPr sz="1800" i="1">
+                <a:solidFill>
+                  <a:srgbClr val="333333"/>
+                </a:solidFill>
+              </a:rPr>
+              <a:t>Have the picture drawn by lunch. The afternoon makes it defensible, not makes it exist.</a:t>
             </a:r>
           </a:p>
         </p:txBody>
@@ -4814,7 +5251,7 @@
           <a:lstStyle/>
           <a:p>
             <a:r>
-              <a:t>How You're Graded (100 pts)</a:t>
+              <a:t>The Pressure Test (14:15)</a:t>
             </a:r>
           </a:p>
         </p:txBody>
@@ -4834,25 +5271,26 @@
           <a:bodyPr/>
           <a:lstStyle/>
           <a:p>
-            <a:endParaRPr/>
-          </a:p>
-          <a:p>
-            <a:endParaRPr/>
-          </a:p>
-          <a:p>
-            <a:endParaRPr/>
-          </a:p>
-          <a:p>
-            <a:endParaRPr/>
-          </a:p>
-          <a:p>
-            <a:endParaRPr/>
-          </a:p>
-          <a:p>
-            <a:endParaRPr/>
-          </a:p>
-          <a:p>
-            <a:endParaRPr/>
+            <a:r>
+              <a:t> You hand your canvas + picture to another team. They hand you theirs.</a:t>
+            </a:r>
+          </a:p>
+          <a:p>
+            <a:r>
+              <a:t> Each side comes back with</a:t>
+            </a:r>
+            <a:r>
+              <a:rPr b="1"/>
+              <a:t> three specific holes</a:t>
+            </a:r>
+            <a:r>
+              <a:t> — not "looks good".</a:t>
+            </a:r>
+          </a:p>
+          <a:p>
+            <a:r>
+              <a:t> Three questions that find them fast:</a:t>
+            </a:r>
           </a:p>
           <a:p>
             <a:endParaRPr/>
@@ -4901,6 +5339,421 @@
           </a:p>
         </p:txBody>
       </p:sp>
+      <p:pic>
+        <p:nvPicPr>
+          <p:cNvPr id="5" name="Picture 4" descr="1.png"/>
+          <p:cNvPicPr>
+            <a:picLocks noChangeAspect="1"/>
+          </p:cNvPicPr>
+          <p:nvPr/>
+        </p:nvPicPr>
+        <p:blipFill>
+          <a:blip r:embed="rId2"/>
+          <a:stretch>
+            <a:fillRect/>
+          </a:stretch>
+        </p:blipFill>
+        <p:spPr>
+          <a:xfrm>
+            <a:off x="0" y="3767930"/>
+            <a:ext cx="9223484" cy="1884799"/>
+          </a:xfrm>
+          <a:prstGeom prst="rect">
+            <a:avLst/>
+          </a:prstGeom>
+        </p:spPr>
+      </p:pic>
+      <p:sp>
+        <p:nvSpPr>
+          <p:cNvPr id="6" name="Rectangle 5"/>
+          <p:cNvSpPr/>
+          <p:nvPr/>
+        </p:nvSpPr>
+        <p:spPr>
+          <a:xfrm>
+            <a:off x="273050" y="6732720"/>
+            <a:ext cx="7507224" cy="877824"/>
+          </a:xfrm>
+          <a:prstGeom prst="rect">
+            <a:avLst/>
+          </a:prstGeom>
+          <a:solidFill>
+            <a:srgbClr val="F2F2F2"/>
+          </a:solidFill>
+          <a:ln>
+            <a:solidFill>
+              <a:srgbClr val="D9D9D9"/>
+            </a:solidFill>
+          </a:ln>
+        </p:spPr>
+        <p:style>
+          <a:lnRef idx="1">
+            <a:schemeClr val="accent1"/>
+          </a:lnRef>
+          <a:fillRef idx="3">
+            <a:schemeClr val="accent1"/>
+          </a:fillRef>
+          <a:effectRef idx="2">
+            <a:schemeClr val="accent1"/>
+          </a:effectRef>
+          <a:fontRef idx="minor">
+            <a:schemeClr val="lt1"/>
+          </a:fontRef>
+        </p:style>
+        <p:txBody>
+          <a:bodyPr lIns="128016" tIns="73152" rIns="128016" bIns="73152" rtlCol="0" anchor="ctr"/>
+          <a:lstStyle/>
+          <a:p>
+            <a:pPr algn="ctr"/>
+            <a:r>
+              <a:rPr sz="1800" i="1" dirty="0">
+                <a:solidFill>
+                  <a:srgbClr val="333333"/>
+                </a:solidFill>
+              </a:rPr>
+              <a:t>Everyone presents having already been attacked once. At 16:00 you defend a design, not read one out.</a:t>
+            </a:r>
+          </a:p>
+        </p:txBody>
+      </p:sp>
+    </p:spTree>
+  </p:cSld>
+  <p:clrMapOvr>
+    <a:masterClrMapping/>
+  </p:clrMapOvr>
+</p:sld>
+</file>
+
+<file path=ppt/slides/slide8.xml><?xml version="1.0" encoding="utf-8"?>
+<p:sld xmlns:a="http://schemas.openxmlformats.org/drawingml/2006/main" xmlns:r="http://schemas.openxmlformats.org/officeDocument/2006/relationships" xmlns:p="http://schemas.openxmlformats.org/presentationml/2006/main">
+  <p:cSld>
+    <p:spTree>
+      <p:nvGrpSpPr>
+        <p:cNvPr id="1" name=""/>
+        <p:cNvGrpSpPr/>
+        <p:nvPr/>
+      </p:nvGrpSpPr>
+      <p:grpSpPr>
+        <a:xfrm>
+          <a:off x="0" y="0"/>
+          <a:ext cx="0" cy="0"/>
+          <a:chOff x="0" y="0"/>
+          <a:chExt cx="0" cy="0"/>
+        </a:xfrm>
+      </p:grpSpPr>
+      <p:sp>
+        <p:nvSpPr>
+          <p:cNvPr id="2" name="Title 1"/>
+          <p:cNvSpPr>
+            <a:spLocks noGrp="1"/>
+          </p:cNvSpPr>
+          <p:nvPr>
+            <p:ph type="title"/>
+          </p:nvPr>
+        </p:nvSpPr>
+        <p:spPr/>
+        <p:txBody>
+          <a:bodyPr/>
+          <a:lstStyle/>
+          <a:p>
+            <a:r>
+              <a:t>The Presentation (10 min / team)</a:t>
+            </a:r>
+          </a:p>
+        </p:txBody>
+      </p:sp>
+      <p:sp>
+        <p:nvSpPr>
+          <p:cNvPr id="3" name="Content Placeholder 2"/>
+          <p:cNvSpPr>
+            <a:spLocks noGrp="1"/>
+          </p:cNvSpPr>
+          <p:nvPr>
+            <p:ph idx="1"/>
+          </p:nvPr>
+        </p:nvSpPr>
+        <p:spPr/>
+        <p:txBody>
+          <a:bodyPr/>
+          <a:lstStyle/>
+          <a:p>
+            <a:endParaRPr dirty="0"/>
+          </a:p>
+          <a:p>
+            <a:endParaRPr lang="en-US" dirty="0"/>
+          </a:p>
+          <a:p>
+            <a:endParaRPr lang="en-US" dirty="0"/>
+          </a:p>
+          <a:p>
+            <a:endParaRPr lang="en-US" dirty="0"/>
+          </a:p>
+          <a:p>
+            <a:endParaRPr dirty="0"/>
+          </a:p>
+          <a:p>
+            <a:r>
+              <a:rPr dirty="0"/>
+              <a:t> The</a:t>
+            </a:r>
+            <a:r>
+              <a:rPr b="1" dirty="0"/>
+              <a:t> "where it breaks"</a:t>
+            </a:r>
+            <a:r>
+              <a:rPr dirty="0"/>
+              <a:t> slot is required, not optional.</a:t>
+            </a:r>
+          </a:p>
+          <a:p>
+            <a:r>
+              <a:rPr dirty="0"/>
+              <a:t> Naming your own failure modes beats any happy path.</a:t>
+            </a:r>
+          </a:p>
+          <a:p>
+            <a:endParaRPr dirty="0"/>
+          </a:p>
+        </p:txBody>
+      </p:sp>
+      <p:sp>
+        <p:nvSpPr>
+          <p:cNvPr id="4" name="TextBox 3"/>
+          <p:cNvSpPr txBox="1"/>
+          <p:nvPr/>
+        </p:nvSpPr>
+        <p:spPr>
+          <a:xfrm>
+            <a:off x="704088" y="8065008"/>
+            <a:ext cx="8915400" cy="228600"/>
+          </a:xfrm>
+          <a:prstGeom prst="rect">
+            <a:avLst/>
+          </a:prstGeom>
+          <a:noFill/>
+        </p:spPr>
+        <p:txBody>
+          <a:bodyPr wrap="none">
+            <a:spAutoFit/>
+          </a:bodyPr>
+          <a:lstStyle/>
+          <a:p>
+            <a:r>
+              <a:rPr sz="800">
+                <a:solidFill>
+                  <a:srgbClr val="000000"/>
+                </a:solidFill>
+              </a:rPr>
+              <a:t>Copyright © 2026 by Elephant Scale, All Rights Reserved</a:t>
+            </a:r>
+          </a:p>
+        </p:txBody>
+      </p:sp>
+      <p:pic>
+        <p:nvPicPr>
+          <p:cNvPr id="5" name="Picture 4" descr="1.png"/>
+          <p:cNvPicPr>
+            <a:picLocks noChangeAspect="1"/>
+          </p:cNvPicPr>
+          <p:nvPr/>
+        </p:nvPicPr>
+        <p:blipFill>
+          <a:blip r:embed="rId2"/>
+          <a:stretch>
+            <a:fillRect/>
+          </a:stretch>
+        </p:blipFill>
+        <p:spPr>
+          <a:xfrm>
+            <a:off x="14287" y="1758455"/>
+            <a:ext cx="9358313" cy="1044275"/>
+          </a:xfrm>
+          <a:prstGeom prst="rect">
+            <a:avLst/>
+          </a:prstGeom>
+        </p:spPr>
+      </p:pic>
+      <p:sp>
+        <p:nvSpPr>
+          <p:cNvPr id="6" name="Rectangle 5"/>
+          <p:cNvSpPr/>
+          <p:nvPr/>
+        </p:nvSpPr>
+        <p:spPr>
+          <a:xfrm>
+            <a:off x="342900" y="6944551"/>
+            <a:ext cx="7507224" cy="877824"/>
+          </a:xfrm>
+          <a:prstGeom prst="rect">
+            <a:avLst/>
+          </a:prstGeom>
+          <a:solidFill>
+            <a:srgbClr val="F2F2F2"/>
+          </a:solidFill>
+          <a:ln>
+            <a:solidFill>
+              <a:srgbClr val="D9D9D9"/>
+            </a:solidFill>
+          </a:ln>
+        </p:spPr>
+        <p:style>
+          <a:lnRef idx="1">
+            <a:schemeClr val="accent1"/>
+          </a:lnRef>
+          <a:fillRef idx="3">
+            <a:schemeClr val="accent1"/>
+          </a:fillRef>
+          <a:effectRef idx="2">
+            <a:schemeClr val="accent1"/>
+          </a:effectRef>
+          <a:fontRef idx="minor">
+            <a:schemeClr val="lt1"/>
+          </a:fontRef>
+        </p:style>
+        <p:txBody>
+          <a:bodyPr lIns="128016" tIns="73152" rIns="128016" bIns="73152" rtlCol="0" anchor="ctr"/>
+          <a:lstStyle/>
+          <a:p>
+            <a:pPr algn="ctr"/>
+            <a:r>
+              <a:rPr sz="1800" i="1">
+                <a:solidFill>
+                  <a:srgbClr val="333333"/>
+                </a:solidFill>
+              </a:rPr>
+              <a:t>Don't tell us it works. Tell us how it fails, and show us where the gate stands.</a:t>
+            </a:r>
+          </a:p>
+        </p:txBody>
+      </p:sp>
+    </p:spTree>
+  </p:cSld>
+  <p:clrMapOvr>
+    <a:masterClrMapping/>
+  </p:clrMapOvr>
+</p:sld>
+</file>
+
+<file path=ppt/slides/slide9.xml><?xml version="1.0" encoding="utf-8"?>
+<p:sld xmlns:a="http://schemas.openxmlformats.org/drawingml/2006/main" xmlns:r="http://schemas.openxmlformats.org/officeDocument/2006/relationships" xmlns:p="http://schemas.openxmlformats.org/presentationml/2006/main">
+  <p:cSld>
+    <p:spTree>
+      <p:nvGrpSpPr>
+        <p:cNvPr id="1" name=""/>
+        <p:cNvGrpSpPr/>
+        <p:nvPr/>
+      </p:nvGrpSpPr>
+      <p:grpSpPr>
+        <a:xfrm>
+          <a:off x="0" y="0"/>
+          <a:ext cx="0" cy="0"/>
+          <a:chOff x="0" y="0"/>
+          <a:chExt cx="0" cy="0"/>
+        </a:xfrm>
+      </p:grpSpPr>
+      <p:sp>
+        <p:nvSpPr>
+          <p:cNvPr id="2" name="Title 1"/>
+          <p:cNvSpPr>
+            <a:spLocks noGrp="1"/>
+          </p:cNvSpPr>
+          <p:nvPr>
+            <p:ph type="title"/>
+          </p:nvPr>
+        </p:nvSpPr>
+        <p:spPr/>
+        <p:txBody>
+          <a:bodyPr/>
+          <a:lstStyle/>
+          <a:p>
+            <a:r>
+              <a:t>How You're Graded (100 pts)</a:t>
+            </a:r>
+          </a:p>
+        </p:txBody>
+      </p:sp>
+      <p:sp>
+        <p:nvSpPr>
+          <p:cNvPr id="3" name="Content Placeholder 2"/>
+          <p:cNvSpPr>
+            <a:spLocks noGrp="1"/>
+          </p:cNvSpPr>
+          <p:nvPr>
+            <p:ph idx="1"/>
+          </p:nvPr>
+        </p:nvSpPr>
+        <p:spPr/>
+        <p:txBody>
+          <a:bodyPr/>
+          <a:lstStyle/>
+          <a:p>
+            <a:endParaRPr/>
+          </a:p>
+          <a:p>
+            <a:endParaRPr/>
+          </a:p>
+          <a:p>
+            <a:endParaRPr/>
+          </a:p>
+          <a:p>
+            <a:endParaRPr/>
+          </a:p>
+          <a:p>
+            <a:endParaRPr/>
+          </a:p>
+          <a:p>
+            <a:endParaRPr/>
+          </a:p>
+          <a:p>
+            <a:endParaRPr/>
+          </a:p>
+          <a:p>
+            <a:endParaRPr/>
+          </a:p>
+          <a:p>
+            <a:endParaRPr/>
+          </a:p>
+          <a:p>
+            <a:endParaRPr/>
+          </a:p>
+          <a:p>
+            <a:endParaRPr/>
+          </a:p>
+        </p:txBody>
+      </p:sp>
+      <p:sp>
+        <p:nvSpPr>
+          <p:cNvPr id="4" name="TextBox 3"/>
+          <p:cNvSpPr txBox="1"/>
+          <p:nvPr/>
+        </p:nvSpPr>
+        <p:spPr>
+          <a:xfrm>
+            <a:off x="704088" y="8065008"/>
+            <a:ext cx="8915400" cy="228600"/>
+          </a:xfrm>
+          <a:prstGeom prst="rect">
+            <a:avLst/>
+          </a:prstGeom>
+          <a:noFill/>
+        </p:spPr>
+        <p:txBody>
+          <a:bodyPr wrap="none">
+            <a:spAutoFit/>
+          </a:bodyPr>
+          <a:lstStyle/>
+          <a:p>
+            <a:r>
+              <a:rPr sz="800">
+                <a:solidFill>
+                  <a:srgbClr val="000000"/>
+                </a:solidFill>
+              </a:rPr>
+              <a:t>Copyright © 2026 by Elephant Scale, All Rights Reserved</a:t>
+            </a:r>
+          </a:p>
+        </p:txBody>
+      </p:sp>
       <p:graphicFrame>
         <p:nvGraphicFramePr>
           <p:cNvPr id="5" name="Table 4"/>
@@ -4910,14 +5763,14 @@
           <p:nvPr>
             <p:extLst>
               <p:ext uri="{D42A27DB-BD31-4B8C-83A1-F6EECF244321}">
-                <p14:modId xmlns:p14="http://schemas.microsoft.com/office/powerpoint/2010/main" val="978740026"/>
+                <p14:modId xmlns:p14="http://schemas.microsoft.com/office/powerpoint/2010/main" val="2097631501"/>
               </p:ext>
             </p:extLst>
           </p:nvPr>
         </p:nvGraphicFramePr>
         <p:xfrm>
-          <a:off x="237744" y="1540382"/>
-          <a:ext cx="8915400" cy="4846320"/>
+          <a:off x="237744" y="1253331"/>
+          <a:ext cx="8915400" cy="4937760"/>
         </p:xfrm>
         <a:graphic>
           <a:graphicData uri="http://schemas.openxmlformats.org/drawingml/2006/table">
@@ -4926,21 +5779,21 @@
                 <a:tableStyleId>{5C22544A-7EE6-4342-B048-85BDC9FD1C3A}</a:tableStyleId>
               </a:tblPr>
               <a:tblGrid>
-                <a:gridCol w="3457956">
+                <a:gridCol w="2971800">
                   <a:extLst>
                     <a:ext uri="{9D8B030D-6E8A-4147-A177-3AD203B41FA5}">
                       <a16:colId xmlns:a16="http://schemas.microsoft.com/office/drawing/2014/main" val="20000"/>
                     </a:ext>
                   </a:extLst>
                 </a:gridCol>
-                <a:gridCol w="1371600">
+                <a:gridCol w="1324356">
                   <a:extLst>
                     <a:ext uri="{9D8B030D-6E8A-4147-A177-3AD203B41FA5}">
                       <a16:colId xmlns:a16="http://schemas.microsoft.com/office/drawing/2014/main" val="20001"/>
                     </a:ext>
                   </a:extLst>
                 </a:gridCol>
-                <a:gridCol w="4085844">
+                <a:gridCol w="4619244">
                   <a:extLst>
                     <a:ext uri="{9D8B030D-6E8A-4147-A177-3AD203B41FA5}">
                       <a16:colId xmlns:a16="http://schemas.microsoft.com/office/drawing/2014/main" val="20002"/>
@@ -4948,7 +5801,7 @@
                   </a:extLst>
                 </a:gridCol>
               </a:tblGrid>
-              <a:tr h="457200">
+              <a:tr h="118269">
                 <a:tc>
                   <a:txBody>
                     <a:bodyPr/>
@@ -5065,7 +5918,7 @@
                     <a:lstStyle/>
                     <a:p>
                       <a:r>
-                        <a:t>Robust loop; recovers from surprises</a:t>
+                        <a:t>A loop you can trace on the picture; says how it recovers</a:t>
                       </a:r>
                     </a:p>
                   </a:txBody>
@@ -5108,7 +5961,7 @@
                     <a:lstStyle/>
                     <a:p>
                       <a:r>
-                        <a:t>Well-specified tools; clean error handling</a:t>
+                        <a:t>Well-specified tools, safety classes, least privilege</a:t>
                       </a:r>
                     </a:p>
                   </a:txBody>
@@ -5151,7 +6004,7 @@
                     <a:lstStyle/>
                     <a:p>
                       <a:r>
-                        <a:t>Measurable lift from self-evaluation</a:t>
+                        <a:t>A named check — and what happens when it fails</a:t>
                       </a:r>
                     </a:p>
                   </a:txBody>
@@ -5237,7 +6090,7 @@
                     <a:lstStyle/>
                     <a:p>
                       <a:r>
-                        <a:t>Frozen set, honest metrics, before/after</a:t>
+                        <a:t>5-8 named cases incl. one unsafe; says what it measures</a:t>
                       </a:r>
                     </a:p>
                   </a:txBody>
@@ -5280,7 +6133,7 @@
                     <a:lstStyle/>
                     <a:p>
                       <a:r>
-                        <a:t>Least privilege, human gate, full audit log</a:t>
+                        <a:t>Gate on the picture, approver named, logging per step</a:t>
                       </a:r>
                     </a:p>
                   </a:txBody>
@@ -5299,7 +6152,7 @@
                     <a:lstStyle/>
                     <a:p>
                       <a:r>
-                        <a:t>Demo &amp; communication</a:t>
+                        <a:t>Communication</a:t>
                       </a:r>
                     </a:p>
                   </a:txBody>
@@ -5324,7 +6177,7 @@
                     <a:p>
                       <a:r>
                         <a:rPr dirty="0"/>
-                        <a:t>Clear demo; team explains tradeoffs</a:t>
+                        <a:t>Defends the design under pushback</a:t>
                       </a:r>
                     </a:p>
                   </a:txBody>
@@ -5348,7 +6201,7 @@
         </p:nvSpPr>
         <p:spPr>
           <a:xfrm>
-            <a:off x="219456" y="6932108"/>
+            <a:off x="571500" y="6670880"/>
             <a:ext cx="7507224" cy="877824"/>
           </a:xfrm>
           <a:prstGeom prst="rect">
@@ -5383,477 +6236,12 @@
           <a:p>
             <a:pPr algn="ctr"/>
             <a:r>
-              <a:rPr sz="1800" i="1">
+              <a:rPr sz="1800" i="1" dirty="0">
                 <a:solidFill>
                   <a:srgbClr val="333333"/>
                 </a:solidFill>
               </a:rPr>
               <a:t>Notice the weights: reasoning, tools, multi-agent, and eval are 60 of 100. Depth beats features.</a:t>
-            </a:r>
-          </a:p>
-        </p:txBody>
-      </p:sp>
-    </p:spTree>
-  </p:cSld>
-  <p:clrMapOvr>
-    <a:masterClrMapping/>
-  </p:clrMapOvr>
-</p:sld>
-</file>
-
-<file path=ppt/slides/slide8.xml><?xml version="1.0" encoding="utf-8"?>
-<p:sld xmlns:a="http://schemas.openxmlformats.org/drawingml/2006/main" xmlns:r="http://schemas.openxmlformats.org/officeDocument/2006/relationships" xmlns:p="http://schemas.openxmlformats.org/presentationml/2006/main">
-  <p:cSld>
-    <p:spTree>
-      <p:nvGrpSpPr>
-        <p:cNvPr id="1" name=""/>
-        <p:cNvGrpSpPr/>
-        <p:nvPr/>
-      </p:nvGrpSpPr>
-      <p:grpSpPr>
-        <a:xfrm>
-          <a:off x="0" y="0"/>
-          <a:ext cx="0" cy="0"/>
-          <a:chOff x="0" y="0"/>
-          <a:chExt cx="0" cy="0"/>
-        </a:xfrm>
-      </p:grpSpPr>
-      <p:sp>
-        <p:nvSpPr>
-          <p:cNvPr id="2" name="Title 1"/>
-          <p:cNvSpPr>
-            <a:spLocks noGrp="1"/>
-          </p:cNvSpPr>
-          <p:nvPr>
-            <p:ph type="title"/>
-          </p:nvPr>
-        </p:nvSpPr>
-        <p:spPr/>
-        <p:txBody>
-          <a:bodyPr/>
-          <a:lstStyle/>
-          <a:p>
-            <a:r>
-              <a:t>Deliverables</a:t>
-            </a:r>
-          </a:p>
-        </p:txBody>
-      </p:sp>
-      <p:sp>
-        <p:nvSpPr>
-          <p:cNvPr id="3" name="Content Placeholder 2"/>
-          <p:cNvSpPr>
-            <a:spLocks noGrp="1"/>
-          </p:cNvSpPr>
-          <p:nvPr>
-            <p:ph idx="1"/>
-          </p:nvPr>
-        </p:nvSpPr>
-        <p:spPr/>
-        <p:txBody>
-          <a:bodyPr/>
-          <a:lstStyle/>
-          <a:p>
-            <a:r>
-              <a:t> Repo with runnable code (or a documented low-code flow) +</a:t>
-            </a:r>
-            <a:r>
-              <a:rPr>
-                <a:latin typeface="Courier New"/>
-              </a:rPr>
-              <a:t> requirements.txt</a:t>
-            </a:r>
-          </a:p>
-          <a:p>
-            <a:r>
-              <a:t> Completed</a:t>
-            </a:r>
-            <a:r>
-              <a:rPr>
-                <a:latin typeface="Courier New"/>
-              </a:rPr>
-              <a:t> agent-design-canvas.md</a:t>
-            </a:r>
-            <a:r>
-              <a:t> </a:t>
-            </a:r>
-            <a:r>
-              <a:rPr b="1"/>
-              <a:t> and</a:t>
-            </a:r>
-            <a:r>
-              <a:t> </a:t>
-            </a:r>
-            <a:r>
-              <a:rPr>
-                <a:latin typeface="Courier New"/>
-              </a:rPr>
-              <a:t> agent-safety-checklist.md</a:t>
-            </a:r>
-          </a:p>
-          <a:p>
-            <a:r>
-              <a:t> Eval set + a results table (before/after one change)</a:t>
-            </a:r>
-          </a:p>
-          <a:p>
-            <a:r>
-              <a:t> A sample</a:t>
-            </a:r>
-            <a:r>
-              <a:rPr b="1"/>
-              <a:t> audit log (JSONL)</a:t>
-            </a:r>
-            <a:r>
-              <a:t> from a real run</a:t>
-            </a:r>
-          </a:p>
-          <a:p>
-            <a:endParaRPr/>
-          </a:p>
-          <a:p>
-            <a:endParaRPr/>
-          </a:p>
-          <a:p>
-            <a:endParaRPr/>
-          </a:p>
-          <a:p>
-            <a:endParaRPr/>
-          </a:p>
-        </p:txBody>
-      </p:sp>
-      <p:sp>
-        <p:nvSpPr>
-          <p:cNvPr id="4" name="TextBox 3"/>
-          <p:cNvSpPr txBox="1"/>
-          <p:nvPr/>
-        </p:nvSpPr>
-        <p:spPr>
-          <a:xfrm>
-            <a:off x="704088" y="8065008"/>
-            <a:ext cx="8915400" cy="228600"/>
-          </a:xfrm>
-          <a:prstGeom prst="rect">
-            <a:avLst/>
-          </a:prstGeom>
-          <a:noFill/>
-        </p:spPr>
-        <p:txBody>
-          <a:bodyPr wrap="none">
-            <a:spAutoFit/>
-          </a:bodyPr>
-          <a:lstStyle/>
-          <a:p>
-            <a:r>
-              <a:rPr sz="800">
-                <a:solidFill>
-                  <a:srgbClr val="000000"/>
-                </a:solidFill>
-              </a:rPr>
-              <a:t>Copyright © 2026 by Elephant Scale, All Rights Reserved</a:t>
-            </a:r>
-          </a:p>
-        </p:txBody>
-      </p:sp>
-      <p:pic>
-        <p:nvPicPr>
-          <p:cNvPr id="5" name="Picture 4" descr="1.png"/>
-          <p:cNvPicPr>
-            <a:picLocks noChangeAspect="1"/>
-          </p:cNvPicPr>
-          <p:nvPr/>
-        </p:nvPicPr>
-        <p:blipFill>
-          <a:blip r:embed="rId2"/>
-          <a:stretch>
-            <a:fillRect/>
-          </a:stretch>
-        </p:blipFill>
-        <p:spPr>
-          <a:xfrm>
-            <a:off x="0" y="3759521"/>
-            <a:ext cx="8636000" cy="1854200"/>
-          </a:xfrm>
-          <a:prstGeom prst="rect">
-            <a:avLst/>
-          </a:prstGeom>
-        </p:spPr>
-      </p:pic>
-      <p:sp>
-        <p:nvSpPr>
-          <p:cNvPr id="6" name="Rectangle 5"/>
-          <p:cNvSpPr/>
-          <p:nvPr/>
-        </p:nvSpPr>
-        <p:spPr>
-          <a:xfrm>
-            <a:off x="495300" y="6661612"/>
-            <a:ext cx="7507224" cy="877824"/>
-          </a:xfrm>
-          <a:prstGeom prst="rect">
-            <a:avLst/>
-          </a:prstGeom>
-          <a:solidFill>
-            <a:srgbClr val="F2F2F2"/>
-          </a:solidFill>
-          <a:ln>
-            <a:solidFill>
-              <a:srgbClr val="D9D9D9"/>
-            </a:solidFill>
-          </a:ln>
-        </p:spPr>
-        <p:style>
-          <a:lnRef idx="1">
-            <a:schemeClr val="accent1"/>
-          </a:lnRef>
-          <a:fillRef idx="3">
-            <a:schemeClr val="accent1"/>
-          </a:fillRef>
-          <a:effectRef idx="2">
-            <a:schemeClr val="accent1"/>
-          </a:effectRef>
-          <a:fontRef idx="minor">
-            <a:schemeClr val="lt1"/>
-          </a:fontRef>
-        </p:style>
-        <p:txBody>
-          <a:bodyPr lIns="128016" tIns="73152" rIns="128016" bIns="73152" rtlCol="0" anchor="ctr"/>
-          <a:lstStyle/>
-          <a:p>
-            <a:pPr algn="ctr"/>
-            <a:r>
-              <a:rPr sz="1800" i="1">
-                <a:solidFill>
-                  <a:srgbClr val="333333"/>
-                </a:solidFill>
-              </a:rPr>
-              <a:t>If the audit log and the eval results are missing, two of the six capabilities are unproven.</a:t>
-            </a:r>
-          </a:p>
-        </p:txBody>
-      </p:sp>
-    </p:spTree>
-  </p:cSld>
-  <p:clrMapOvr>
-    <a:masterClrMapping/>
-  </p:clrMapOvr>
-</p:sld>
-</file>
-
-<file path=ppt/slides/slide9.xml><?xml version="1.0" encoding="utf-8"?>
-<p:sld xmlns:a="http://schemas.openxmlformats.org/drawingml/2006/main" xmlns:r="http://schemas.openxmlformats.org/officeDocument/2006/relationships" xmlns:p="http://schemas.openxmlformats.org/presentationml/2006/main">
-  <p:cSld>
-    <p:spTree>
-      <p:nvGrpSpPr>
-        <p:cNvPr id="1" name=""/>
-        <p:cNvGrpSpPr/>
-        <p:nvPr/>
-      </p:nvGrpSpPr>
-      <p:grpSpPr>
-        <a:xfrm>
-          <a:off x="0" y="0"/>
-          <a:ext cx="0" cy="0"/>
-          <a:chOff x="0" y="0"/>
-          <a:chExt cx="0" cy="0"/>
-        </a:xfrm>
-      </p:grpSpPr>
-      <p:sp>
-        <p:nvSpPr>
-          <p:cNvPr id="2" name="Title 1"/>
-          <p:cNvSpPr>
-            <a:spLocks noGrp="1"/>
-          </p:cNvSpPr>
-          <p:nvPr>
-            <p:ph type="title"/>
-          </p:nvPr>
-        </p:nvSpPr>
-        <p:spPr/>
-        <p:txBody>
-          <a:bodyPr/>
-          <a:lstStyle/>
-          <a:p>
-            <a:r>
-              <a:t>Tips</a:t>
-            </a:r>
-          </a:p>
-        </p:txBody>
-      </p:sp>
-      <p:sp>
-        <p:nvSpPr>
-          <p:cNvPr id="3" name="Content Placeholder 2"/>
-          <p:cNvSpPr>
-            <a:spLocks noGrp="1"/>
-          </p:cNvSpPr>
-          <p:nvPr>
-            <p:ph idx="1"/>
-          </p:nvPr>
-        </p:nvSpPr>
-        <p:spPr/>
-        <p:txBody>
-          <a:bodyPr/>
-          <a:lstStyle/>
-          <a:p>
-            <a:r>
-              <a:rPr b="1"/>
-              <a:t> Thin thread first</a:t>
-            </a:r>
-            <a:r>
-              <a:t> — one supervisor, one worker, one tool, one logged run</a:t>
-            </a:r>
-          </a:p>
-          <a:p>
-            <a:r>
-              <a:rPr b="1"/>
-              <a:t> Freeze the eval set early</a:t>
-            </a:r>
-            <a:r>
-              <a:t> and never edit it — that's how "before/after" means anything</a:t>
-            </a:r>
-          </a:p>
-          <a:p>
-            <a:r>
-              <a:rPr b="1"/>
-              <a:t> Fake slow/expensive tools</a:t>
-            </a:r>
-            <a:r>
-              <a:t> with local stubs; spend your time on the</a:t>
-            </a:r>
-            <a:r>
-              <a:rPr i="1"/>
-              <a:t> loop</a:t>
-            </a:r>
-            <a:r>
-              <a:t> , not integrations</a:t>
-            </a:r>
-          </a:p>
-          <a:p>
-            <a:r>
-              <a:rPr b="1"/>
-              <a:t> Cap the loop</a:t>
-            </a:r>
-            <a:r>
-              <a:t> (max steps + cost) on line one</a:t>
-            </a:r>
-          </a:p>
-          <a:p>
-            <a:r>
-              <a:rPr b="1"/>
-              <a:t> One dangerous action, well-gated</a:t>
-            </a:r>
-            <a:r>
-              <a:t> beats five ungated ones</a:t>
-            </a:r>
-          </a:p>
-          <a:p>
-            <a:r>
-              <a:t> Reuse the course assets:</a:t>
-            </a:r>
-            <a:r>
-              <a:rPr>
-                <a:latin typeface="Courier New"/>
-              </a:rPr>
-              <a:t> help_center.md</a:t>
-            </a:r>
-            <a:r>
-              <a:t> ,</a:t>
-            </a:r>
-            <a:r>
-              <a:rPr>
-                <a:latin typeface="Courier New"/>
-              </a:rPr>
-              <a:t> support_tickets.csv</a:t>
-            </a:r>
-            <a:r>
-              <a:t> , the audit schema</a:t>
-            </a:r>
-          </a:p>
-          <a:p>
-            <a:endParaRPr/>
-          </a:p>
-        </p:txBody>
-      </p:sp>
-      <p:sp>
-        <p:nvSpPr>
-          <p:cNvPr id="4" name="TextBox 3"/>
-          <p:cNvSpPr txBox="1"/>
-          <p:nvPr/>
-        </p:nvSpPr>
-        <p:spPr>
-          <a:xfrm>
-            <a:off x="704088" y="8065008"/>
-            <a:ext cx="8915400" cy="228600"/>
-          </a:xfrm>
-          <a:prstGeom prst="rect">
-            <a:avLst/>
-          </a:prstGeom>
-          <a:noFill/>
-        </p:spPr>
-        <p:txBody>
-          <a:bodyPr wrap="none">
-            <a:spAutoFit/>
-          </a:bodyPr>
-          <a:lstStyle/>
-          <a:p>
-            <a:r>
-              <a:rPr sz="800">
-                <a:solidFill>
-                  <a:srgbClr val="000000"/>
-                </a:solidFill>
-              </a:rPr>
-              <a:t>Copyright © 2026 by Elephant Scale, All Rights Reserved</a:t>
-            </a:r>
-          </a:p>
-        </p:txBody>
-      </p:sp>
-      <p:sp>
-        <p:nvSpPr>
-          <p:cNvPr id="5" name="Rectangle 4"/>
-          <p:cNvSpPr/>
-          <p:nvPr/>
-        </p:nvSpPr>
-        <p:spPr>
-          <a:xfrm>
-            <a:off x="419100" y="6863975"/>
-            <a:ext cx="7507224" cy="877824"/>
-          </a:xfrm>
-          <a:prstGeom prst="rect">
-            <a:avLst/>
-          </a:prstGeom>
-          <a:solidFill>
-            <a:srgbClr val="F2F2F2"/>
-          </a:solidFill>
-          <a:ln>
-            <a:solidFill>
-              <a:srgbClr val="D9D9D9"/>
-            </a:solidFill>
-          </a:ln>
-        </p:spPr>
-        <p:style>
-          <a:lnRef idx="1">
-            <a:schemeClr val="accent1"/>
-          </a:lnRef>
-          <a:fillRef idx="3">
-            <a:schemeClr val="accent1"/>
-          </a:fillRef>
-          <a:effectRef idx="2">
-            <a:schemeClr val="accent1"/>
-          </a:effectRef>
-          <a:fontRef idx="minor">
-            <a:schemeClr val="lt1"/>
-          </a:fontRef>
-        </p:style>
-        <p:txBody>
-          <a:bodyPr lIns="128016" tIns="73152" rIns="128016" bIns="73152" rtlCol="0" anchor="ctr"/>
-          <a:lstStyle/>
-          <a:p>
-            <a:pPr algn="ctr"/>
-            <a:r>
-              <a:rPr sz="1800" i="1">
-                <a:solidFill>
-                  <a:srgbClr val="333333"/>
-                </a:solidFill>
-              </a:rPr>
-              <a:t>Every hour ask: "what's the one thing that, if it breaks in the demo, sinks us?" Fix that.</a:t>
             </a:r>
           </a:p>
         </p:txBody>
